--- a/AI_agent/docs/career-mission-demo.pptx
+++ b/AI_agent/docs/career-mission-demo.pptx
@@ -4,15 +4,19 @@
   <p:sldMasterIdLst>
     <p:sldMasterId id="2147483648" r:id="rId1"/>
   </p:sldMasterIdLst>
+  <p:notesMasterIdLst>
+    <p:notesMasterId r:id="rId11"/>
+  </p:notesMasterIdLst>
   <p:sldIdLst>
     <p:sldId id="256" r:id="rId2"/>
     <p:sldId id="257" r:id="rId3"/>
     <p:sldId id="258" r:id="rId4"/>
     <p:sldId id="259" r:id="rId5"/>
     <p:sldId id="260" r:id="rId6"/>
-    <p:sldId id="261" r:id="rId7"/>
-    <p:sldId id="262" r:id="rId8"/>
-    <p:sldId id="263" r:id="rId9"/>
+    <p:sldId id="264" r:id="rId7"/>
+    <p:sldId id="261" r:id="rId8"/>
+    <p:sldId id="262" r:id="rId9"/>
+    <p:sldId id="263" r:id="rId10"/>
   </p:sldIdLst>
   <p:sldSz cx="12192000" cy="6858000"/>
   <p:notesSz cx="6858000" cy="9144000"/>
@@ -119,6 +123,439 @@
 </p:presentation>
 </file>
 
+<file path=ppt/notesMasters/notesMaster1.xml><?xml version="1.0" encoding="utf-8"?>
+<p:notesMaster xmlns:a="http://schemas.openxmlformats.org/drawingml/2006/main" xmlns:r="http://schemas.openxmlformats.org/officeDocument/2006/relationships" xmlns:p="http://schemas.openxmlformats.org/presentationml/2006/main">
+  <p:cSld>
+    <p:bg>
+      <p:bgRef idx="1001">
+        <a:schemeClr val="bg1"/>
+      </p:bgRef>
+    </p:bg>
+    <p:spTree>
+      <p:nvGrpSpPr>
+        <p:cNvPr id="1" name=""/>
+        <p:cNvGrpSpPr/>
+        <p:nvPr/>
+      </p:nvGrpSpPr>
+      <p:grpSpPr>
+        <a:xfrm>
+          <a:off x="0" y="0"/>
+          <a:ext cx="0" cy="0"/>
+          <a:chOff x="0" y="0"/>
+          <a:chExt cx="0" cy="0"/>
+        </a:xfrm>
+      </p:grpSpPr>
+      <p:sp>
+        <p:nvSpPr>
+          <p:cNvPr id="2" name="머리글 개체 틀 1"/>
+          <p:cNvSpPr>
+            <a:spLocks noGrp="1"/>
+          </p:cNvSpPr>
+          <p:nvPr>
+            <p:ph type="hdr" sz="quarter"/>
+          </p:nvPr>
+        </p:nvSpPr>
+        <p:spPr>
+          <a:xfrm>
+            <a:off x="0" y="0"/>
+            <a:ext cx="2971800" cy="458788"/>
+          </a:xfrm>
+          <a:prstGeom prst="rect">
+            <a:avLst/>
+          </a:prstGeom>
+        </p:spPr>
+        <p:txBody>
+          <a:bodyPr vert="horz" lIns="91440" tIns="45720" rIns="91440" bIns="45720" rtlCol="0"/>
+          <a:lstStyle>
+            <a:lvl1pPr algn="l">
+              <a:defRPr sz="1200"/>
+            </a:lvl1pPr>
+          </a:lstStyle>
+          <a:p>
+            <a:endParaRPr lang="ko-KR" altLang="en-US"/>
+          </a:p>
+        </p:txBody>
+      </p:sp>
+      <p:sp>
+        <p:nvSpPr>
+          <p:cNvPr id="3" name="날짜 개체 틀 2"/>
+          <p:cNvSpPr>
+            <a:spLocks noGrp="1"/>
+          </p:cNvSpPr>
+          <p:nvPr>
+            <p:ph type="dt" idx="1"/>
+          </p:nvPr>
+        </p:nvSpPr>
+        <p:spPr>
+          <a:xfrm>
+            <a:off x="3884613" y="0"/>
+            <a:ext cx="2971800" cy="458788"/>
+          </a:xfrm>
+          <a:prstGeom prst="rect">
+            <a:avLst/>
+          </a:prstGeom>
+        </p:spPr>
+        <p:txBody>
+          <a:bodyPr vert="horz" lIns="91440" tIns="45720" rIns="91440" bIns="45720" rtlCol="0"/>
+          <a:lstStyle>
+            <a:lvl1pPr algn="r">
+              <a:defRPr sz="1200"/>
+            </a:lvl1pPr>
+          </a:lstStyle>
+          <a:p>
+            <a:fld id="{D0D9E854-174D-4B80-A8A9-63D7CA74772D}" type="datetimeFigureOut">
+              <a:rPr lang="ko-KR" altLang="en-US" smtClean="0"/>
+              <a:t>2026-07-16</a:t>
+            </a:fld>
+            <a:endParaRPr lang="ko-KR" altLang="en-US"/>
+          </a:p>
+        </p:txBody>
+      </p:sp>
+      <p:sp>
+        <p:nvSpPr>
+          <p:cNvPr id="4" name="슬라이드 이미지 개체 틀 3"/>
+          <p:cNvSpPr>
+            <a:spLocks noGrp="1" noRot="1" noChangeAspect="1"/>
+          </p:cNvSpPr>
+          <p:nvPr>
+            <p:ph type="sldImg" idx="2"/>
+          </p:nvPr>
+        </p:nvSpPr>
+        <p:spPr>
+          <a:xfrm>
+            <a:off x="685800" y="1143000"/>
+            <a:ext cx="5486400" cy="3086100"/>
+          </a:xfrm>
+          <a:prstGeom prst="rect">
+            <a:avLst/>
+          </a:prstGeom>
+          <a:noFill/>
+          <a:ln w="12700">
+            <a:solidFill>
+              <a:prstClr val="black"/>
+            </a:solidFill>
+          </a:ln>
+        </p:spPr>
+        <p:txBody>
+          <a:bodyPr vert="horz" lIns="91440" tIns="45720" rIns="91440" bIns="45720" rtlCol="0" anchor="ctr"/>
+          <a:lstStyle/>
+          <a:p>
+            <a:endParaRPr lang="ko-KR" altLang="en-US"/>
+          </a:p>
+        </p:txBody>
+      </p:sp>
+      <p:sp>
+        <p:nvSpPr>
+          <p:cNvPr id="5" name="슬라이드 노트 개체 틀 4"/>
+          <p:cNvSpPr>
+            <a:spLocks noGrp="1"/>
+          </p:cNvSpPr>
+          <p:nvPr>
+            <p:ph type="body" sz="quarter" idx="3"/>
+          </p:nvPr>
+        </p:nvSpPr>
+        <p:spPr>
+          <a:xfrm>
+            <a:off x="685800" y="4400550"/>
+            <a:ext cx="5486400" cy="3600450"/>
+          </a:xfrm>
+          <a:prstGeom prst="rect">
+            <a:avLst/>
+          </a:prstGeom>
+        </p:spPr>
+        <p:txBody>
+          <a:bodyPr vert="horz" lIns="91440" tIns="45720" rIns="91440" bIns="45720" rtlCol="0"/>
+          <a:lstStyle/>
+          <a:p>
+            <a:pPr lvl="0"/>
+            <a:r>
+              <a:rPr lang="ko-KR" altLang="en-US"/>
+              <a:t>마스터 텍스트 스타일을 편집하려면 클릭</a:t>
+            </a:r>
+          </a:p>
+          <a:p>
+            <a:pPr lvl="1"/>
+            <a:r>
+              <a:rPr lang="ko-KR" altLang="en-US"/>
+              <a:t>두 번째 수준</a:t>
+            </a:r>
+          </a:p>
+          <a:p>
+            <a:pPr lvl="2"/>
+            <a:r>
+              <a:rPr lang="ko-KR" altLang="en-US"/>
+              <a:t>세 번째 수준</a:t>
+            </a:r>
+          </a:p>
+          <a:p>
+            <a:pPr lvl="3"/>
+            <a:r>
+              <a:rPr lang="ko-KR" altLang="en-US"/>
+              <a:t>네 번째 수준</a:t>
+            </a:r>
+          </a:p>
+          <a:p>
+            <a:pPr lvl="4"/>
+            <a:r>
+              <a:rPr lang="ko-KR" altLang="en-US"/>
+              <a:t>다섯 번째 수준</a:t>
+            </a:r>
+          </a:p>
+        </p:txBody>
+      </p:sp>
+      <p:sp>
+        <p:nvSpPr>
+          <p:cNvPr id="6" name="바닥글 개체 틀 5"/>
+          <p:cNvSpPr>
+            <a:spLocks noGrp="1"/>
+          </p:cNvSpPr>
+          <p:nvPr>
+            <p:ph type="ftr" sz="quarter" idx="4"/>
+          </p:nvPr>
+        </p:nvSpPr>
+        <p:spPr>
+          <a:xfrm>
+            <a:off x="0" y="8685213"/>
+            <a:ext cx="2971800" cy="458787"/>
+          </a:xfrm>
+          <a:prstGeom prst="rect">
+            <a:avLst/>
+          </a:prstGeom>
+        </p:spPr>
+        <p:txBody>
+          <a:bodyPr vert="horz" lIns="91440" tIns="45720" rIns="91440" bIns="45720" rtlCol="0" anchor="b"/>
+          <a:lstStyle>
+            <a:lvl1pPr algn="l">
+              <a:defRPr sz="1200"/>
+            </a:lvl1pPr>
+          </a:lstStyle>
+          <a:p>
+            <a:endParaRPr lang="ko-KR" altLang="en-US"/>
+          </a:p>
+        </p:txBody>
+      </p:sp>
+      <p:sp>
+        <p:nvSpPr>
+          <p:cNvPr id="7" name="슬라이드 번호 개체 틀 6"/>
+          <p:cNvSpPr>
+            <a:spLocks noGrp="1"/>
+          </p:cNvSpPr>
+          <p:nvPr>
+            <p:ph type="sldNum" sz="quarter" idx="5"/>
+          </p:nvPr>
+        </p:nvSpPr>
+        <p:spPr>
+          <a:xfrm>
+            <a:off x="3884613" y="8685213"/>
+            <a:ext cx="2971800" cy="458787"/>
+          </a:xfrm>
+          <a:prstGeom prst="rect">
+            <a:avLst/>
+          </a:prstGeom>
+        </p:spPr>
+        <p:txBody>
+          <a:bodyPr vert="horz" lIns="91440" tIns="45720" rIns="91440" bIns="45720" rtlCol="0" anchor="b"/>
+          <a:lstStyle>
+            <a:lvl1pPr algn="r">
+              <a:defRPr sz="1200"/>
+            </a:lvl1pPr>
+          </a:lstStyle>
+          <a:p>
+            <a:fld id="{7AE5027A-94FB-484F-9A22-8521B58DA499}" type="slidenum">
+              <a:rPr lang="ko-KR" altLang="en-US" smtClean="0"/>
+              <a:t>‹#›</a:t>
+            </a:fld>
+            <a:endParaRPr lang="ko-KR" altLang="en-US"/>
+          </a:p>
+        </p:txBody>
+      </p:sp>
+    </p:spTree>
+    <p:extLst>
+      <p:ext uri="{BB962C8B-B14F-4D97-AF65-F5344CB8AC3E}">
+        <p14:creationId xmlns:p14="http://schemas.microsoft.com/office/powerpoint/2010/main" val="2139478440"/>
+      </p:ext>
+    </p:extLst>
+  </p:cSld>
+  <p:clrMap bg1="lt1" tx1="dk1" bg2="lt2" tx2="dk2" accent1="accent1" accent2="accent2" accent3="accent3" accent4="accent4" accent5="accent5" accent6="accent6" hlink="hlink" folHlink="folHlink"/>
+  <p:notesStyle>
+    <a:lvl1pPr marL="0" algn="l" defTabSz="914400" rtl="0" eaLnBrk="1" latinLnBrk="1" hangingPunct="1">
+      <a:defRPr sz="1200" kern="1200">
+        <a:solidFill>
+          <a:schemeClr val="tx1"/>
+        </a:solidFill>
+        <a:latin typeface="+mn-lt"/>
+        <a:ea typeface="+mn-ea"/>
+        <a:cs typeface="+mn-cs"/>
+      </a:defRPr>
+    </a:lvl1pPr>
+    <a:lvl2pPr marL="457200" algn="l" defTabSz="914400" rtl="0" eaLnBrk="1" latinLnBrk="1" hangingPunct="1">
+      <a:defRPr sz="1200" kern="1200">
+        <a:solidFill>
+          <a:schemeClr val="tx1"/>
+        </a:solidFill>
+        <a:latin typeface="+mn-lt"/>
+        <a:ea typeface="+mn-ea"/>
+        <a:cs typeface="+mn-cs"/>
+      </a:defRPr>
+    </a:lvl2pPr>
+    <a:lvl3pPr marL="914400" algn="l" defTabSz="914400" rtl="0" eaLnBrk="1" latinLnBrk="1" hangingPunct="1">
+      <a:defRPr sz="1200" kern="1200">
+        <a:solidFill>
+          <a:schemeClr val="tx1"/>
+        </a:solidFill>
+        <a:latin typeface="+mn-lt"/>
+        <a:ea typeface="+mn-ea"/>
+        <a:cs typeface="+mn-cs"/>
+      </a:defRPr>
+    </a:lvl3pPr>
+    <a:lvl4pPr marL="1371600" algn="l" defTabSz="914400" rtl="0" eaLnBrk="1" latinLnBrk="1" hangingPunct="1">
+      <a:defRPr sz="1200" kern="1200">
+        <a:solidFill>
+          <a:schemeClr val="tx1"/>
+        </a:solidFill>
+        <a:latin typeface="+mn-lt"/>
+        <a:ea typeface="+mn-ea"/>
+        <a:cs typeface="+mn-cs"/>
+      </a:defRPr>
+    </a:lvl4pPr>
+    <a:lvl5pPr marL="1828800" algn="l" defTabSz="914400" rtl="0" eaLnBrk="1" latinLnBrk="1" hangingPunct="1">
+      <a:defRPr sz="1200" kern="1200">
+        <a:solidFill>
+          <a:schemeClr val="tx1"/>
+        </a:solidFill>
+        <a:latin typeface="+mn-lt"/>
+        <a:ea typeface="+mn-ea"/>
+        <a:cs typeface="+mn-cs"/>
+      </a:defRPr>
+    </a:lvl5pPr>
+    <a:lvl6pPr marL="2286000" algn="l" defTabSz="914400" rtl="0" eaLnBrk="1" latinLnBrk="1" hangingPunct="1">
+      <a:defRPr sz="1200" kern="1200">
+        <a:solidFill>
+          <a:schemeClr val="tx1"/>
+        </a:solidFill>
+        <a:latin typeface="+mn-lt"/>
+        <a:ea typeface="+mn-ea"/>
+        <a:cs typeface="+mn-cs"/>
+      </a:defRPr>
+    </a:lvl6pPr>
+    <a:lvl7pPr marL="2743200" algn="l" defTabSz="914400" rtl="0" eaLnBrk="1" latinLnBrk="1" hangingPunct="1">
+      <a:defRPr sz="1200" kern="1200">
+        <a:solidFill>
+          <a:schemeClr val="tx1"/>
+        </a:solidFill>
+        <a:latin typeface="+mn-lt"/>
+        <a:ea typeface="+mn-ea"/>
+        <a:cs typeface="+mn-cs"/>
+      </a:defRPr>
+    </a:lvl7pPr>
+    <a:lvl8pPr marL="3200400" algn="l" defTabSz="914400" rtl="0" eaLnBrk="1" latinLnBrk="1" hangingPunct="1">
+      <a:defRPr sz="1200" kern="1200">
+        <a:solidFill>
+          <a:schemeClr val="tx1"/>
+        </a:solidFill>
+        <a:latin typeface="+mn-lt"/>
+        <a:ea typeface="+mn-ea"/>
+        <a:cs typeface="+mn-cs"/>
+      </a:defRPr>
+    </a:lvl8pPr>
+    <a:lvl9pPr marL="3657600" algn="l" defTabSz="914400" rtl="0" eaLnBrk="1" latinLnBrk="1" hangingPunct="1">
+      <a:defRPr sz="1200" kern="1200">
+        <a:solidFill>
+          <a:schemeClr val="tx1"/>
+        </a:solidFill>
+        <a:latin typeface="+mn-lt"/>
+        <a:ea typeface="+mn-ea"/>
+        <a:cs typeface="+mn-cs"/>
+      </a:defRPr>
+    </a:lvl9pPr>
+  </p:notesStyle>
+</p:notesMaster>
+</file>
+
+<file path=ppt/notesSlides/notesSlide1.xml><?xml version="1.0" encoding="utf-8"?>
+<p:notes xmlns:a="http://schemas.openxmlformats.org/drawingml/2006/main" xmlns:r="http://schemas.openxmlformats.org/officeDocument/2006/relationships" xmlns:p="http://schemas.openxmlformats.org/presentationml/2006/main">
+  <p:cSld>
+    <p:spTree>
+      <p:nvGrpSpPr>
+        <p:cNvPr id="1" name=""/>
+        <p:cNvGrpSpPr/>
+        <p:nvPr/>
+      </p:nvGrpSpPr>
+      <p:grpSpPr>
+        <a:xfrm>
+          <a:off x="0" y="0"/>
+          <a:ext cx="0" cy="0"/>
+          <a:chOff x="0" y="0"/>
+          <a:chExt cx="0" cy="0"/>
+        </a:xfrm>
+      </p:grpSpPr>
+      <p:sp>
+        <p:nvSpPr>
+          <p:cNvPr id="2" name="슬라이드 이미지 개체 틀 1"/>
+          <p:cNvSpPr>
+            <a:spLocks noGrp="1" noRot="1" noChangeAspect="1"/>
+          </p:cNvSpPr>
+          <p:nvPr>
+            <p:ph type="sldImg"/>
+          </p:nvPr>
+        </p:nvSpPr>
+        <p:spPr/>
+      </p:sp>
+      <p:sp>
+        <p:nvSpPr>
+          <p:cNvPr id="3" name="슬라이드 노트 개체 틀 2"/>
+          <p:cNvSpPr>
+            <a:spLocks noGrp="1"/>
+          </p:cNvSpPr>
+          <p:nvPr>
+            <p:ph type="body" idx="1"/>
+          </p:nvPr>
+        </p:nvSpPr>
+        <p:spPr/>
+        <p:txBody>
+          <a:bodyPr/>
+          <a:lstStyle/>
+          <a:p>
+            <a:endParaRPr lang="ko-KR" altLang="en-US" dirty="0"/>
+          </a:p>
+        </p:txBody>
+      </p:sp>
+      <p:sp>
+        <p:nvSpPr>
+          <p:cNvPr id="4" name="슬라이드 번호 개체 틀 3"/>
+          <p:cNvSpPr>
+            <a:spLocks noGrp="1"/>
+          </p:cNvSpPr>
+          <p:nvPr>
+            <p:ph type="sldNum" sz="quarter" idx="5"/>
+          </p:nvPr>
+        </p:nvSpPr>
+        <p:spPr/>
+        <p:txBody>
+          <a:bodyPr/>
+          <a:lstStyle/>
+          <a:p>
+            <a:fld id="{7AE5027A-94FB-484F-9A22-8521B58DA499}" type="slidenum">
+              <a:rPr lang="ko-KR" altLang="en-US" smtClean="0"/>
+              <a:t>5</a:t>
+            </a:fld>
+            <a:endParaRPr lang="ko-KR" altLang="en-US"/>
+          </a:p>
+        </p:txBody>
+      </p:sp>
+    </p:spTree>
+    <p:extLst>
+      <p:ext uri="{BB962C8B-B14F-4D97-AF65-F5344CB8AC3E}">
+        <p14:creationId xmlns:p14="http://schemas.microsoft.com/office/powerpoint/2010/main" val="2701884343"/>
+      </p:ext>
+    </p:extLst>
+  </p:cSld>
+  <p:clrMapOvr>
+    <a:masterClrMapping/>
+  </p:clrMapOvr>
+</p:notes>
+</file>
+
 <file path=ppt/slideLayouts/slideLayout1.xml><?xml version="1.0" encoding="utf-8"?>
 <p:sldLayout xmlns:a="http://schemas.openxmlformats.org/drawingml/2006/main" xmlns:r="http://schemas.openxmlformats.org/officeDocument/2006/relationships" xmlns:p="http://schemas.openxmlformats.org/presentationml/2006/main" type="title" preserve="1">
   <p:cSld name="제목 슬라이드">
@@ -266,7 +703,7 @@
           <a:p>
             <a:fld id="{5E58B4AC-3BE0-489F-A59F-CE6D816F98D0}" type="datetimeFigureOut">
               <a:rPr lang="ko-KR" altLang="en-US" smtClean="0"/>
-              <a:t>2026-07-15</a:t>
+              <a:t>2026-07-16</a:t>
             </a:fld>
             <a:endParaRPr lang="ko-KR" altLang="en-US"/>
           </a:p>
@@ -464,7 +901,7 @@
           <a:p>
             <a:fld id="{5E58B4AC-3BE0-489F-A59F-CE6D816F98D0}" type="datetimeFigureOut">
               <a:rPr lang="ko-KR" altLang="en-US" smtClean="0"/>
-              <a:t>2026-07-15</a:t>
+              <a:t>2026-07-16</a:t>
             </a:fld>
             <a:endParaRPr lang="ko-KR" altLang="en-US"/>
           </a:p>
@@ -672,7 +1109,7 @@
           <a:p>
             <a:fld id="{5E58B4AC-3BE0-489F-A59F-CE6D816F98D0}" type="datetimeFigureOut">
               <a:rPr lang="ko-KR" altLang="en-US" smtClean="0"/>
-              <a:t>2026-07-15</a:t>
+              <a:t>2026-07-16</a:t>
             </a:fld>
             <a:endParaRPr lang="ko-KR" altLang="en-US"/>
           </a:p>
@@ -870,7 +1307,7 @@
           <a:p>
             <a:fld id="{5E58B4AC-3BE0-489F-A59F-CE6D816F98D0}" type="datetimeFigureOut">
               <a:rPr lang="ko-KR" altLang="en-US" smtClean="0"/>
-              <a:t>2026-07-15</a:t>
+              <a:t>2026-07-16</a:t>
             </a:fld>
             <a:endParaRPr lang="ko-KR" altLang="en-US"/>
           </a:p>
@@ -1145,7 +1582,7 @@
           <a:p>
             <a:fld id="{5E58B4AC-3BE0-489F-A59F-CE6D816F98D0}" type="datetimeFigureOut">
               <a:rPr lang="ko-KR" altLang="en-US" smtClean="0"/>
-              <a:t>2026-07-15</a:t>
+              <a:t>2026-07-16</a:t>
             </a:fld>
             <a:endParaRPr lang="ko-KR" altLang="en-US"/>
           </a:p>
@@ -1410,7 +1847,7 @@
           <a:p>
             <a:fld id="{5E58B4AC-3BE0-489F-A59F-CE6D816F98D0}" type="datetimeFigureOut">
               <a:rPr lang="ko-KR" altLang="en-US" smtClean="0"/>
-              <a:t>2026-07-15</a:t>
+              <a:t>2026-07-16</a:t>
             </a:fld>
             <a:endParaRPr lang="ko-KR" altLang="en-US"/>
           </a:p>
@@ -1822,7 +2259,7 @@
           <a:p>
             <a:fld id="{5E58B4AC-3BE0-489F-A59F-CE6D816F98D0}" type="datetimeFigureOut">
               <a:rPr lang="ko-KR" altLang="en-US" smtClean="0"/>
-              <a:t>2026-07-15</a:t>
+              <a:t>2026-07-16</a:t>
             </a:fld>
             <a:endParaRPr lang="ko-KR" altLang="en-US"/>
           </a:p>
@@ -1963,7 +2400,7 @@
           <a:p>
             <a:fld id="{5E58B4AC-3BE0-489F-A59F-CE6D816F98D0}" type="datetimeFigureOut">
               <a:rPr lang="ko-KR" altLang="en-US" smtClean="0"/>
-              <a:t>2026-07-15</a:t>
+              <a:t>2026-07-16</a:t>
             </a:fld>
             <a:endParaRPr lang="ko-KR" altLang="en-US"/>
           </a:p>
@@ -2076,7 +2513,7 @@
           <a:p>
             <a:fld id="{5E58B4AC-3BE0-489F-A59F-CE6D816F98D0}" type="datetimeFigureOut">
               <a:rPr lang="ko-KR" altLang="en-US" smtClean="0"/>
-              <a:t>2026-07-15</a:t>
+              <a:t>2026-07-16</a:t>
             </a:fld>
             <a:endParaRPr lang="ko-KR" altLang="en-US"/>
           </a:p>
@@ -2387,7 +2824,7 @@
           <a:p>
             <a:fld id="{5E58B4AC-3BE0-489F-A59F-CE6D816F98D0}" type="datetimeFigureOut">
               <a:rPr lang="ko-KR" altLang="en-US" smtClean="0"/>
-              <a:t>2026-07-15</a:t>
+              <a:t>2026-07-16</a:t>
             </a:fld>
             <a:endParaRPr lang="ko-KR" altLang="en-US"/>
           </a:p>
@@ -2675,7 +3112,7 @@
           <a:p>
             <a:fld id="{5E58B4AC-3BE0-489F-A59F-CE6D816F98D0}" type="datetimeFigureOut">
               <a:rPr lang="ko-KR" altLang="en-US" smtClean="0"/>
-              <a:t>2026-07-15</a:t>
+              <a:t>2026-07-16</a:t>
             </a:fld>
             <a:endParaRPr lang="ko-KR" altLang="en-US"/>
           </a:p>
@@ -2916,7 +3353,7 @@
           <a:p>
             <a:fld id="{5E58B4AC-3BE0-489F-A59F-CE6D816F98D0}" type="datetimeFigureOut">
               <a:rPr lang="ko-KR" altLang="en-US" smtClean="0"/>
-              <a:t>2026-07-15</a:t>
+              <a:t>2026-07-16</a:t>
             </a:fld>
             <a:endParaRPr lang="ko-KR" altLang="en-US"/>
           </a:p>
@@ -3486,64 +3923,10 @@
       </p:sp>
       <p:sp>
         <p:nvSpPr>
-          <p:cNvPr id="4" name="직사각형 3">
-            <a:extLst>
-              <a:ext uri="{FF2B5EF4-FFF2-40B4-BE49-F238E27FC236}">
-                <a16:creationId xmlns:a16="http://schemas.microsoft.com/office/drawing/2014/main" id="{FB661C0B-8DCE-9979-C4D0-06A2B9921660}"/>
-              </a:ext>
-            </a:extLst>
-          </p:cNvPr>
-          <p:cNvSpPr/>
-          <p:nvPr/>
-        </p:nvSpPr>
-        <p:spPr>
-          <a:xfrm>
-            <a:off x="736600" y="2260600"/>
-            <a:ext cx="10718800" cy="3238500"/>
-          </a:xfrm>
-          <a:prstGeom prst="rect">
-            <a:avLst/>
-          </a:prstGeom>
-          <a:solidFill>
-            <a:srgbClr val="FFFFFF"/>
-          </a:solidFill>
-          <a:ln>
-            <a:solidFill>
-              <a:srgbClr val="E0E0E0"/>
-            </a:solidFill>
-          </a:ln>
-        </p:spPr>
-        <p:style>
-          <a:lnRef idx="2">
-            <a:schemeClr val="accent1">
-              <a:shade val="15000"/>
-            </a:schemeClr>
-          </a:lnRef>
-          <a:fillRef idx="1">
-            <a:schemeClr val="accent1"/>
-          </a:fillRef>
-          <a:effectRef idx="0">
-            <a:schemeClr val="accent1"/>
-          </a:effectRef>
-          <a:fontRef idx="minor">
-            <a:schemeClr val="lt1"/>
-          </a:fontRef>
-        </p:style>
-        <p:txBody>
-          <a:bodyPr rtlCol="0" anchor="ctr"/>
-          <a:lstStyle/>
-          <a:p>
-            <a:pPr algn="ctr"/>
-            <a:endParaRPr lang="ko-KR" altLang="en-US"/>
-          </a:p>
-        </p:txBody>
-      </p:sp>
-      <p:sp>
-        <p:nvSpPr>
-          <p:cNvPr id="5" name="TextBox 4">
-            <a:extLst>
-              <a:ext uri="{FF2B5EF4-FFF2-40B4-BE49-F238E27FC236}">
-                <a16:creationId xmlns:a16="http://schemas.microsoft.com/office/drawing/2014/main" id="{2B8C5C17-909B-30E9-D5DB-FAB4210D4098}"/>
+          <p:cNvPr id="6" name="TextBox 5">
+            <a:extLst>
+              <a:ext uri="{FF2B5EF4-FFF2-40B4-BE49-F238E27FC236}">
+                <a16:creationId xmlns:a16="http://schemas.microsoft.com/office/drawing/2014/main" id="{8B943EA7-23F9-5D23-79F2-82503927648F}"/>
               </a:ext>
             </a:extLst>
           </p:cNvPr>
@@ -3552,8 +3935,8 @@
         </p:nvSpPr>
         <p:spPr>
           <a:xfrm>
-            <a:off x="1168400" y="2692400"/>
-            <a:ext cx="9906000" cy="774571"/>
+            <a:off x="812800" y="6350000"/>
+            <a:ext cx="4572000" cy="230832"/>
           </a:xfrm>
           <a:prstGeom prst="rect">
             <a:avLst/>
@@ -3566,103 +3949,6 @@
           </a:bodyPr>
           <a:lstStyle/>
           <a:p>
-            <a:pPr>
-              <a:spcAft>
-                <a:spcPts val="1000"/>
-              </a:spcAft>
-            </a:pPr>
-            <a:r>
-              <a:rPr lang="en-US" altLang="ko-KR">
-                <a:solidFill>
-                  <a:srgbClr val="343434"/>
-                </a:solidFill>
-                <a:latin typeface="맑은 고딕" panose="020B0503020000020004" pitchFamily="50" charset="-127"/>
-              </a:rPr>
-              <a:t>• </a:t>
-            </a:r>
-            <a:r>
-              <a:rPr lang="ko-KR" altLang="en-US">
-                <a:solidFill>
-                  <a:srgbClr val="343434"/>
-                </a:solidFill>
-                <a:latin typeface="맑은 고딕" panose="020B0503020000020004" pitchFamily="50" charset="-127"/>
-              </a:rPr>
-              <a:t>프로젝트 핵심 인증 흐름 정리</a:t>
-            </a:r>
-          </a:p>
-          <a:p>
-            <a:pPr>
-              <a:spcAft>
-                <a:spcPts val="1000"/>
-              </a:spcAft>
-            </a:pPr>
-            <a:r>
-              <a:rPr lang="en-US" altLang="ko-KR">
-                <a:solidFill>
-                  <a:srgbClr val="343434"/>
-                </a:solidFill>
-                <a:latin typeface="맑은 고딕" panose="020B0503020000020004" pitchFamily="50" charset="-127"/>
-              </a:rPr>
-              <a:t>• API </a:t>
-            </a:r>
-            <a:r>
-              <a:rPr lang="ko-KR" altLang="en-US">
-                <a:solidFill>
-                  <a:srgbClr val="343434"/>
-                </a:solidFill>
-                <a:latin typeface="맑은 고딕" panose="020B0503020000020004" pitchFamily="50" charset="-127"/>
-              </a:rPr>
-              <a:t>명세서와 </a:t>
-            </a:r>
-            <a:r>
-              <a:rPr lang="en-US" altLang="ko-KR">
-                <a:solidFill>
-                  <a:srgbClr val="343434"/>
-                </a:solidFill>
-                <a:latin typeface="맑은 고딕" panose="020B0503020000020004" pitchFamily="50" charset="-127"/>
-              </a:rPr>
-              <a:t>ADR </a:t>
-            </a:r>
-            <a:r>
-              <a:rPr lang="ko-KR" altLang="en-US">
-                <a:solidFill>
-                  <a:srgbClr val="343434"/>
-                </a:solidFill>
-                <a:latin typeface="맑은 고딕" panose="020B0503020000020004" pitchFamily="50" charset="-127"/>
-              </a:rPr>
-              <a:t>문서화</a:t>
-            </a:r>
-          </a:p>
-        </p:txBody>
-      </p:sp>
-      <p:sp>
-        <p:nvSpPr>
-          <p:cNvPr id="6" name="TextBox 5">
-            <a:extLst>
-              <a:ext uri="{FF2B5EF4-FFF2-40B4-BE49-F238E27FC236}">
-                <a16:creationId xmlns:a16="http://schemas.microsoft.com/office/drawing/2014/main" id="{8B943EA7-23F9-5D23-79F2-82503927648F}"/>
-              </a:ext>
-            </a:extLst>
-          </p:cNvPr>
-          <p:cNvSpPr txBox="1"/>
-          <p:nvPr/>
-        </p:nvSpPr>
-        <p:spPr>
-          <a:xfrm>
-            <a:off x="812800" y="6350000"/>
-            <a:ext cx="4572000" cy="230832"/>
-          </a:xfrm>
-          <a:prstGeom prst="rect">
-            <a:avLst/>
-          </a:prstGeom>
-          <a:noFill/>
-        </p:spPr>
-        <p:txBody>
-          <a:bodyPr vert="horz" rtlCol="0">
-            <a:spAutoFit/>
-          </a:bodyPr>
-          <a:lstStyle/>
-          <a:p>
             <a:r>
               <a:rPr lang="en-US" altLang="ko-KR" sz="900">
                 <a:solidFill>
@@ -3670,14 +3956,121 @@
                 </a:solidFill>
                 <a:latin typeface="Arial" panose="020B0604020202020204" pitchFamily="34" charset="0"/>
               </a:rPr>
-              <a:t>Career Mission AI · 1/6</a:t>
-            </a:r>
-            <a:endParaRPr lang="ko-KR" altLang="en-US" sz="900">
+              <a:t>Career Mission AI · 1/9</a:t>
+            </a:r>
+            <a:endParaRPr lang="ko-KR" altLang="en-US" sz="900" dirty="0">
               <a:solidFill>
                 <a:srgbClr val="686472"/>
               </a:solidFill>
               <a:latin typeface="Arial" panose="020B0604020202020204" pitchFamily="34" charset="0"/>
             </a:endParaRPr>
+          </a:p>
+        </p:txBody>
+      </p:sp>
+      <p:pic>
+        <p:nvPicPr>
+          <p:cNvPr id="10" name="그림 9">
+            <a:extLst>
+              <a:ext uri="{FF2B5EF4-FFF2-40B4-BE49-F238E27FC236}">
+                <a16:creationId xmlns:a16="http://schemas.microsoft.com/office/drawing/2014/main" id="{40F86E2C-9CA5-618D-8F32-CF5ED41C25DB}"/>
+              </a:ext>
+            </a:extLst>
+          </p:cNvPr>
+          <p:cNvPicPr>
+            <a:picLocks noChangeAspect="1"/>
+          </p:cNvPicPr>
+          <p:nvPr/>
+        </p:nvPicPr>
+        <p:blipFill>
+          <a:blip r:embed="rId2">
+            <a:extLst>
+              <a:ext uri="{28A0092B-C50C-407E-A947-70E740481C1C}">
+                <a14:useLocalDpi xmlns:a14="http://schemas.microsoft.com/office/drawing/2010/main" val="0"/>
+              </a:ext>
+            </a:extLst>
+          </a:blip>
+          <a:stretch>
+            <a:fillRect/>
+          </a:stretch>
+        </p:blipFill>
+        <p:spPr>
+          <a:xfrm>
+            <a:off x="812800" y="1836717"/>
+            <a:ext cx="4657379" cy="4411683"/>
+          </a:xfrm>
+          <a:prstGeom prst="rect">
+            <a:avLst/>
+          </a:prstGeom>
+        </p:spPr>
+      </p:pic>
+      <p:sp>
+        <p:nvSpPr>
+          <p:cNvPr id="12" name="TextBox 11">
+            <a:extLst>
+              <a:ext uri="{FF2B5EF4-FFF2-40B4-BE49-F238E27FC236}">
+                <a16:creationId xmlns:a16="http://schemas.microsoft.com/office/drawing/2014/main" id="{7D1FEE08-A7FA-93C7-9407-C0237D7568E4}"/>
+              </a:ext>
+            </a:extLst>
+          </p:cNvPr>
+          <p:cNvSpPr txBox="1"/>
+          <p:nvPr/>
+        </p:nvSpPr>
+        <p:spPr>
+          <a:xfrm>
+            <a:off x="6247741" y="3429000"/>
+            <a:ext cx="5710711" cy="646331"/>
+          </a:xfrm>
+          <a:prstGeom prst="rect">
+            <a:avLst/>
+          </a:prstGeom>
+          <a:noFill/>
+        </p:spPr>
+        <p:txBody>
+          <a:bodyPr wrap="square">
+            <a:spAutoFit/>
+          </a:bodyPr>
+          <a:lstStyle/>
+          <a:p>
+            <a:r>
+              <a:rPr lang="ko-KR" altLang="en-US" b="0" i="0" spc="14">
+                <a:solidFill>
+                  <a:srgbClr val="475569"/>
+                </a:solidFill>
+                <a:effectLst/>
+                <a:latin typeface="Arial" panose="020B0604020202020204" pitchFamily="34" charset="0"/>
+              </a:rPr>
+              <a:t>목표 직무에 맞춰 부족한 역량을 찾고</a:t>
+            </a:r>
+            <a:r>
+              <a:rPr lang="en-US" altLang="ko-KR" b="0" i="0" spc="14">
+                <a:solidFill>
+                  <a:srgbClr val="475569"/>
+                </a:solidFill>
+                <a:effectLst/>
+                <a:latin typeface="Arial" panose="020B0604020202020204" pitchFamily="34" charset="0"/>
+              </a:rPr>
+              <a:t>,</a:t>
+            </a:r>
+            <a:br>
+              <a:rPr lang="en-US" altLang="ko-KR" b="0" i="0" spc="14">
+                <a:solidFill>
+                  <a:srgbClr val="475569"/>
+                </a:solidFill>
+                <a:effectLst/>
+                <a:latin typeface="Arial" panose="020B0604020202020204" pitchFamily="34" charset="0"/>
+              </a:rPr>
+            </a:br>
+            <a:r>
+              <a:rPr lang="ko-KR" altLang="en-US" b="0" i="0" spc="14">
+                <a:solidFill>
+                  <a:srgbClr val="475569"/>
+                </a:solidFill>
+                <a:effectLst/>
+                <a:latin typeface="Arial" panose="020B0604020202020204" pitchFamily="34" charset="0"/>
+              </a:rPr>
+              <a:t>포트폴리오로 남길 수 있는 실무형 미션을 제안합니다</a:t>
+            </a:r>
+            <a:endParaRPr lang="ko-KR" altLang="en-US" dirty="0"/>
           </a:p>
         </p:txBody>
       </p:sp>
@@ -4049,9 +4442,9 @@
                 </a:solidFill>
                 <a:latin typeface="Arial" panose="020B0604020202020204" pitchFamily="34" charset="0"/>
               </a:rPr>
-              <a:t>Career Mission AI · 2/6</a:t>
-            </a:r>
-            <a:endParaRPr lang="ko-KR" altLang="en-US" sz="900">
+              <a:t>Career Mission AI · 2/9</a:t>
+            </a:r>
+            <a:endParaRPr lang="ko-KR" altLang="en-US" sz="900" dirty="0">
               <a:solidFill>
                 <a:srgbClr val="686472"/>
               </a:solidFill>
@@ -4392,9 +4785,9 @@
                 </a:solidFill>
                 <a:latin typeface="Arial" panose="020B0604020202020204" pitchFamily="34" charset="0"/>
               </a:rPr>
-              <a:t>Career Mission AI · 3/6</a:t>
-            </a:r>
-            <a:endParaRPr lang="ko-KR" altLang="en-US" sz="900">
+              <a:t>Career Mission AI · 3/9</a:t>
+            </a:r>
+            <a:endParaRPr lang="ko-KR" altLang="en-US" sz="900" dirty="0">
               <a:solidFill>
                 <a:srgbClr val="686472"/>
               </a:solidFill>
@@ -4403,6 +4796,36 @@
           </a:p>
         </p:txBody>
       </p:sp>
+      <p:pic>
+        <p:nvPicPr>
+          <p:cNvPr id="7" name="그림 6">
+            <a:extLst>
+              <a:ext uri="{FF2B5EF4-FFF2-40B4-BE49-F238E27FC236}">
+                <a16:creationId xmlns:a16="http://schemas.microsoft.com/office/drawing/2014/main" id="{8B58BDC6-09AE-80C4-E1A9-01FDA310AE54}"/>
+              </a:ext>
+            </a:extLst>
+          </p:cNvPr>
+          <p:cNvPicPr>
+            <a:picLocks noChangeAspect="1"/>
+          </p:cNvPicPr>
+          <p:nvPr/>
+        </p:nvPicPr>
+        <p:blipFill>
+          <a:blip r:embed="rId2"/>
+          <a:stretch>
+            <a:fillRect/>
+          </a:stretch>
+        </p:blipFill>
+        <p:spPr>
+          <a:xfrm>
+            <a:off x="7167275" y="947022"/>
+            <a:ext cx="4940504" cy="4963956"/>
+          </a:xfrm>
+          <a:prstGeom prst="rect">
+            <a:avLst/>
+          </a:prstGeom>
+        </p:spPr>
+      </p:pic>
     </p:spTree>
     <p:extLst>
       <p:ext uri="{BB962C8B-B14F-4D97-AF65-F5344CB8AC3E}">
@@ -4735,9 +5158,9 @@
                 </a:solidFill>
                 <a:latin typeface="Arial" panose="020B0604020202020204" pitchFamily="34" charset="0"/>
               </a:rPr>
-              <a:t>Career Mission AI · 4/6</a:t>
-            </a:r>
-            <a:endParaRPr lang="ko-KR" altLang="en-US" sz="900">
+              <a:t>Career Mission AI · 4/9</a:t>
+            </a:r>
+            <a:endParaRPr lang="ko-KR" altLang="en-US" sz="900" dirty="0">
               <a:solidFill>
                 <a:srgbClr val="686472"/>
               </a:solidFill>
@@ -4746,6 +5169,36 @@
           </a:p>
         </p:txBody>
       </p:sp>
+      <p:pic>
+        <p:nvPicPr>
+          <p:cNvPr id="7" name="그림 6">
+            <a:extLst>
+              <a:ext uri="{FF2B5EF4-FFF2-40B4-BE49-F238E27FC236}">
+                <a16:creationId xmlns:a16="http://schemas.microsoft.com/office/drawing/2014/main" id="{0AC81739-DA48-D0A1-B351-A58F3AFBD0FD}"/>
+              </a:ext>
+            </a:extLst>
+          </p:cNvPr>
+          <p:cNvPicPr>
+            <a:picLocks noChangeAspect="1"/>
+          </p:cNvPicPr>
+          <p:nvPr/>
+        </p:nvPicPr>
+        <p:blipFill>
+          <a:blip r:embed="rId2"/>
+          <a:stretch>
+            <a:fillRect/>
+          </a:stretch>
+        </p:blipFill>
+        <p:spPr>
+          <a:xfrm>
+            <a:off x="7458384" y="3769449"/>
+            <a:ext cx="4428816" cy="2975476"/>
+          </a:xfrm>
+          <a:prstGeom prst="rect">
+            <a:avLst/>
+          </a:prstGeom>
+        </p:spPr>
+      </p:pic>
     </p:spTree>
     <p:extLst>
       <p:ext uri="{BB962C8B-B14F-4D97-AF65-F5344CB8AC3E}">
@@ -5094,6 +5547,12 @@
               </a:rPr>
               <a:t>중복 이메일과 잘못된 입력값은 백엔드에서 검증</a:t>
             </a:r>
+            <a:endParaRPr lang="ko-KR" altLang="en-US" dirty="0">
+              <a:solidFill>
+                <a:srgbClr val="343434"/>
+              </a:solidFill>
+              <a:latin typeface="맑은 고딕" panose="020B0503020000020004" pitchFamily="50" charset="-127"/>
+            </a:endParaRPr>
           </a:p>
         </p:txBody>
       </p:sp>
@@ -5132,14 +5591,151 @@
                 </a:solidFill>
                 <a:latin typeface="Arial" panose="020B0604020202020204" pitchFamily="34" charset="0"/>
               </a:rPr>
-              <a:t>Career Mission AI · 5/6</a:t>
-            </a:r>
-            <a:endParaRPr lang="ko-KR" altLang="en-US" sz="900">
+              <a:t>Career Mission AI · 5/9</a:t>
+            </a:r>
+            <a:endParaRPr lang="ko-KR" altLang="en-US" sz="900" dirty="0">
               <a:solidFill>
                 <a:srgbClr val="686472"/>
               </a:solidFill>
               <a:latin typeface="Arial" panose="020B0604020202020204" pitchFamily="34" charset="0"/>
             </a:endParaRPr>
+          </a:p>
+        </p:txBody>
+      </p:sp>
+      <p:pic>
+        <p:nvPicPr>
+          <p:cNvPr id="7" name="그림 6">
+            <a:extLst>
+              <a:ext uri="{FF2B5EF4-FFF2-40B4-BE49-F238E27FC236}">
+                <a16:creationId xmlns:a16="http://schemas.microsoft.com/office/drawing/2014/main" id="{0B290702-50E4-8CDE-060B-7DA676A23D10}"/>
+              </a:ext>
+            </a:extLst>
+          </p:cNvPr>
+          <p:cNvPicPr>
+            <a:picLocks noChangeAspect="1"/>
+          </p:cNvPicPr>
+          <p:nvPr/>
+        </p:nvPicPr>
+        <p:blipFill>
+          <a:blip r:embed="rId3"/>
+          <a:stretch>
+            <a:fillRect/>
+          </a:stretch>
+        </p:blipFill>
+        <p:spPr>
+          <a:xfrm>
+            <a:off x="7832558" y="745958"/>
+            <a:ext cx="4359442" cy="5366084"/>
+          </a:xfrm>
+          <a:prstGeom prst="rect">
+            <a:avLst/>
+          </a:prstGeom>
+        </p:spPr>
+      </p:pic>
+      <p:sp>
+        <p:nvSpPr>
+          <p:cNvPr id="9" name="TextBox 8">
+            <a:extLst>
+              <a:ext uri="{FF2B5EF4-FFF2-40B4-BE49-F238E27FC236}">
+                <a16:creationId xmlns:a16="http://schemas.microsoft.com/office/drawing/2014/main" id="{B615DBCD-6A8B-2ED0-AB8B-70548C3319AB}"/>
+              </a:ext>
+            </a:extLst>
+          </p:cNvPr>
+          <p:cNvSpPr txBox="1"/>
+          <p:nvPr/>
+        </p:nvSpPr>
+        <p:spPr>
+          <a:xfrm>
+            <a:off x="1168400" y="3822088"/>
+            <a:ext cx="6519194" cy="1015663"/>
+          </a:xfrm>
+          <a:prstGeom prst="rect">
+            <a:avLst/>
+          </a:prstGeom>
+          <a:noFill/>
+        </p:spPr>
+        <p:txBody>
+          <a:bodyPr wrap="square">
+            <a:spAutoFit/>
+          </a:bodyPr>
+          <a:lstStyle/>
+          <a:p>
+            <a:r>
+              <a:rPr lang="ko-KR" altLang="en-US" sz="1500"/>
+              <a:t>“</a:t>
+            </a:r>
+            <a:r>
+              <a:rPr lang="en-US" altLang="ko-KR" sz="1500"/>
+              <a:t>OpenAI API</a:t>
+            </a:r>
+            <a:r>
+              <a:rPr lang="ko-KR" altLang="en-US" sz="1500"/>
+              <a:t>를 챗봇처럼 대화에 쓰는 것이 아닌</a:t>
+            </a:r>
+            <a:r>
+              <a:rPr lang="en-US" altLang="ko-KR" sz="1500"/>
+              <a:t>, </a:t>
+            </a:r>
+            <a:br>
+              <a:rPr lang="en-US" altLang="ko-KR" sz="1500"/>
+            </a:br>
+            <a:r>
+              <a:rPr lang="ko-KR" altLang="en-US" sz="1500"/>
+              <a:t>사용자의 스펙 데이터를 정해진 기준에 따라 분석하는 엔진으로 사용</a:t>
+            </a:r>
+          </a:p>
+          <a:p>
+            <a:r>
+              <a:rPr lang="en-US" altLang="ko-KR" sz="1500"/>
+              <a:t>AI</a:t>
+            </a:r>
+            <a:r>
+              <a:rPr lang="ko-KR" altLang="en-US" sz="1500"/>
+              <a:t>는 준비도 점수</a:t>
+            </a:r>
+            <a:r>
+              <a:rPr lang="en-US" altLang="ko-KR" sz="1500"/>
+              <a:t>, </a:t>
+            </a:r>
+            <a:r>
+              <a:rPr lang="ko-KR" altLang="en-US" sz="1500"/>
+              <a:t>강점</a:t>
+            </a:r>
+            <a:r>
+              <a:rPr lang="en-US" altLang="ko-KR" sz="1500"/>
+              <a:t>, </a:t>
+            </a:r>
+            <a:r>
+              <a:rPr lang="ko-KR" altLang="en-US" sz="1500"/>
+              <a:t>부족한 점</a:t>
+            </a:r>
+            <a:r>
+              <a:rPr lang="en-US" altLang="ko-KR" sz="1500"/>
+              <a:t>, </a:t>
+            </a:r>
+            <a:r>
+              <a:rPr lang="ko-KR" altLang="en-US" sz="1500"/>
+              <a:t>추천 행동을 </a:t>
+            </a:r>
+            <a:r>
+              <a:rPr lang="en-US" altLang="ko-KR" sz="1500"/>
+              <a:t>JSON </a:t>
+            </a:r>
+            <a:r>
+              <a:rPr lang="ko-KR" altLang="en-US" sz="1500"/>
+              <a:t>형식으로 반환하고</a:t>
+            </a:r>
+            <a:r>
+              <a:rPr lang="en-US" altLang="ko-KR" sz="1500"/>
+              <a:t>, </a:t>
+            </a:r>
+          </a:p>
+          <a:p>
+            <a:r>
+              <a:rPr lang="ko-KR" altLang="en-US" sz="1500"/>
+              <a:t>화면에서는 그 결과를 구조화</a:t>
+            </a:r>
+            <a:endParaRPr lang="ko-KR" altLang="en-US" sz="1500" dirty="0"/>
           </a:p>
         </p:txBody>
       </p:sp>
@@ -5159,17 +5755,15 @@
 <file path=ppt/slides/slide6.xml><?xml version="1.0" encoding="utf-8"?>
 <p:sld xmlns:a="http://schemas.openxmlformats.org/drawingml/2006/main" xmlns:r="http://schemas.openxmlformats.org/officeDocument/2006/relationships" xmlns:p="http://schemas.openxmlformats.org/presentationml/2006/main">
   <p:cSld>
-    <p:bg>
-      <p:bgPr>
-        <a:solidFill>
-          <a:srgbClr val="F8FCFC"/>
-        </a:solidFill>
-        <a:effectLst/>
-      </p:bgPr>
-    </p:bg>
     <p:spTree>
       <p:nvGrpSpPr>
-        <p:cNvPr id="1" name=""/>
+        <p:cNvPr id="1" name="">
+          <a:extLst>
+            <a:ext uri="{FF2B5EF4-FFF2-40B4-BE49-F238E27FC236}">
+              <a16:creationId xmlns:a16="http://schemas.microsoft.com/office/drawing/2014/main" id="{04E98135-264C-1D74-1438-FD6366DB421B}"/>
+            </a:ext>
+          </a:extLst>
+        </p:cNvPr>
         <p:cNvGrpSpPr/>
         <p:nvPr/>
       </p:nvGrpSpPr>
@@ -5186,7 +5780,7 @@
           <p:cNvPr id="2" name="TextBox 1">
             <a:extLst>
               <a:ext uri="{FF2B5EF4-FFF2-40B4-BE49-F238E27FC236}">
-                <a16:creationId xmlns:a16="http://schemas.microsoft.com/office/drawing/2014/main" id="{364781B6-DA0E-D7EE-567A-F34875328C4A}"/>
+                <a16:creationId xmlns:a16="http://schemas.microsoft.com/office/drawing/2014/main" id="{A9949D70-1869-FF3B-5E1B-7F7910FD13C0}"/>
               </a:ext>
             </a:extLst>
           </p:cNvPr>
@@ -5216,8 +5810,14 @@
                 </a:solidFill>
                 <a:latin typeface="맑은 고딕" panose="020B0503020000020004" pitchFamily="50" charset="-127"/>
               </a:rPr>
-              <a:t>데모 순서와 다음 과제</a:t>
-            </a:r>
+              <a:t>추천 미션</a:t>
+            </a:r>
+            <a:endParaRPr lang="ko-KR" altLang="en-US" sz="3000" b="1" dirty="0">
+              <a:solidFill>
+                <a:srgbClr val="0F1716"/>
+              </a:solidFill>
+              <a:latin typeface="맑은 고딕" panose="020B0503020000020004" pitchFamily="50" charset="-127"/>
+            </a:endParaRPr>
           </a:p>
         </p:txBody>
       </p:sp>
@@ -5226,7 +5826,7 @@
           <p:cNvPr id="3" name="직사각형 2">
             <a:extLst>
               <a:ext uri="{FF2B5EF4-FFF2-40B4-BE49-F238E27FC236}">
-                <a16:creationId xmlns:a16="http://schemas.microsoft.com/office/drawing/2014/main" id="{1F206F41-66F4-DBC7-6B11-41B22097DB9C}"/>
+                <a16:creationId xmlns:a16="http://schemas.microsoft.com/office/drawing/2014/main" id="{EC0674ED-CD75-4287-74BD-240FD7B2C587}"/>
               </a:ext>
             </a:extLst>
           </p:cNvPr>
@@ -5280,7 +5880,7 @@
           <p:cNvPr id="4" name="TextBox 3">
             <a:extLst>
               <a:ext uri="{FF2B5EF4-FFF2-40B4-BE49-F238E27FC236}">
-                <a16:creationId xmlns:a16="http://schemas.microsoft.com/office/drawing/2014/main" id="{BB047DBB-09ED-F937-4DF0-2FB3D2668D3D}"/>
+                <a16:creationId xmlns:a16="http://schemas.microsoft.com/office/drawing/2014/main" id="{B422F5C6-1FBE-7045-A739-967C9A857E46}"/>
               </a:ext>
             </a:extLst>
           </p:cNvPr>
@@ -5289,8 +5889,8 @@
         </p:nvSpPr>
         <p:spPr>
           <a:xfrm>
-            <a:off x="1168400" y="2184400"/>
-            <a:ext cx="9906000" cy="1585049"/>
+            <a:off x="1143000" y="3041714"/>
+            <a:ext cx="9906000" cy="1179810"/>
           </a:xfrm>
           <a:prstGeom prst="rect">
             <a:avLst/>
@@ -5324,7 +5924,25 @@
                 </a:solidFill>
                 <a:latin typeface="맑은 고딕" panose="020B0503020000020004" pitchFamily="50" charset="-127"/>
               </a:rPr>
-              <a:t>회원가입 → 인증 메일 안내 → 로그인 → 마이페이지 수정 시연</a:t>
+              <a:t>등록한 스펙에 따라 </a:t>
+            </a:r>
+            <a:r>
+              <a:rPr lang="en-US" altLang="ko-KR">
+                <a:solidFill>
+                  <a:srgbClr val="343434"/>
+                </a:solidFill>
+                <a:latin typeface="맑은 고딕" panose="020B0503020000020004" pitchFamily="50" charset="-127"/>
+              </a:rPr>
+              <a:t>AI</a:t>
+            </a:r>
+            <a:r>
+              <a:rPr lang="ko-KR" altLang="en-US">
+                <a:solidFill>
+                  <a:srgbClr val="343434"/>
+                </a:solidFill>
+                <a:latin typeface="맑은 고딕" panose="020B0503020000020004" pitchFamily="50" charset="-127"/>
+              </a:rPr>
+              <a:t>가 미션 추천</a:t>
             </a:r>
           </a:p>
           <a:p>
@@ -5349,7 +5967,7 @@
                 </a:solidFill>
                 <a:latin typeface="맑은 고딕" panose="020B0503020000020004" pitchFamily="50" charset="-127"/>
               </a:rPr>
-              <a:t>로그아웃 후 보호 페이지 접근 차단 확인</a:t>
+              <a:t>미션 시작 버튼을 누르면 진행상황 체크 가능</a:t>
             </a:r>
           </a:p>
           <a:p>
@@ -5374,7 +5992,7 @@
                 </a:solidFill>
                 <a:latin typeface="맑은 고딕" panose="020B0503020000020004" pitchFamily="50" charset="-127"/>
               </a:rPr>
-              <a:t>다음 과제</a:t>
+              <a:t>결과물 업로드 후 </a:t>
             </a:r>
             <a:r>
               <a:rPr lang="en-US" altLang="ko-KR">
@@ -5383,7 +6001,7 @@
                 </a:solidFill>
                 <a:latin typeface="맑은 고딕" panose="020B0503020000020004" pitchFamily="50" charset="-127"/>
               </a:rPr>
-              <a:t>: </a:t>
+              <a:t>AI</a:t>
             </a:r>
             <a:r>
               <a:rPr lang="ko-KR" altLang="en-US">
@@ -5392,87 +6010,14 @@
                 </a:solidFill>
                 <a:latin typeface="맑은 고딕" panose="020B0503020000020004" pitchFamily="50" charset="-127"/>
               </a:rPr>
-              <a:t>실제 </a:t>
-            </a:r>
-            <a:r>
-              <a:rPr lang="en-US" altLang="ko-KR">
-                <a:solidFill>
-                  <a:srgbClr val="343434"/>
-                </a:solidFill>
-                <a:latin typeface="맑은 고딕" panose="020B0503020000020004" pitchFamily="50" charset="-127"/>
-              </a:rPr>
-              <a:t>SMTP </a:t>
-            </a:r>
-            <a:r>
-              <a:rPr lang="ko-KR" altLang="en-US">
-                <a:solidFill>
-                  <a:srgbClr val="343434"/>
-                </a:solidFill>
-                <a:latin typeface="맑은 고딕" panose="020B0503020000020004" pitchFamily="50" charset="-127"/>
-              </a:rPr>
-              <a:t>발송 검증</a:t>
-            </a:r>
-          </a:p>
-          <a:p>
-            <a:pPr>
-              <a:spcAft>
-                <a:spcPts val="1000"/>
-              </a:spcAft>
-            </a:pPr>
-            <a:r>
-              <a:rPr lang="en-US" altLang="ko-KR">
-                <a:solidFill>
-                  <a:srgbClr val="343434"/>
-                </a:solidFill>
-                <a:latin typeface="맑은 고딕" panose="020B0503020000020004" pitchFamily="50" charset="-127"/>
-              </a:rPr>
-              <a:t>• </a:t>
-            </a:r>
-            <a:r>
-              <a:rPr lang="ko-KR" altLang="en-US">
-                <a:solidFill>
-                  <a:srgbClr val="343434"/>
-                </a:solidFill>
-                <a:latin typeface="맑은 고딕" panose="020B0503020000020004" pitchFamily="50" charset="-127"/>
-              </a:rPr>
-              <a:t>다음 과제</a:t>
-            </a:r>
-            <a:r>
-              <a:rPr lang="en-US" altLang="ko-KR">
-                <a:solidFill>
-                  <a:srgbClr val="343434"/>
-                </a:solidFill>
-                <a:latin typeface="맑은 고딕" panose="020B0503020000020004" pitchFamily="50" charset="-127"/>
-              </a:rPr>
-              <a:t>: </a:t>
-            </a:r>
-            <a:r>
-              <a:rPr lang="ko-KR" altLang="en-US">
-                <a:solidFill>
-                  <a:srgbClr val="343434"/>
-                </a:solidFill>
-                <a:latin typeface="맑은 고딕" panose="020B0503020000020004" pitchFamily="50" charset="-127"/>
-              </a:rPr>
-              <a:t>미션 진행과 결과물 업로드 </a:t>
-            </a:r>
-            <a:r>
-              <a:rPr lang="en-US" altLang="ko-KR">
-                <a:solidFill>
-                  <a:srgbClr val="343434"/>
-                </a:solidFill>
-                <a:latin typeface="맑은 고딕" panose="020B0503020000020004" pitchFamily="50" charset="-127"/>
-              </a:rPr>
-              <a:t>API </a:t>
-            </a:r>
-            <a:r>
-              <a:rPr lang="ko-KR" altLang="en-US">
-                <a:solidFill>
-                  <a:srgbClr val="343434"/>
-                </a:solidFill>
-                <a:latin typeface="맑은 고딕" panose="020B0503020000020004" pitchFamily="50" charset="-127"/>
-              </a:rPr>
-              <a:t>구현</a:t>
-            </a:r>
+              <a:t>가 결과물 분석</a:t>
+            </a:r>
+            <a:endParaRPr lang="ko-KR" altLang="en-US" dirty="0">
+              <a:solidFill>
+                <a:srgbClr val="343434"/>
+              </a:solidFill>
+              <a:latin typeface="맑은 고딕" panose="020B0503020000020004" pitchFamily="50" charset="-127"/>
+            </a:endParaRPr>
           </a:p>
         </p:txBody>
       </p:sp>
@@ -5481,7 +6026,7 @@
           <p:cNvPr id="5" name="TextBox 4">
             <a:extLst>
               <a:ext uri="{FF2B5EF4-FFF2-40B4-BE49-F238E27FC236}">
-                <a16:creationId xmlns:a16="http://schemas.microsoft.com/office/drawing/2014/main" id="{36580D93-71EE-B491-9F8F-5FCCB98C6FFA}"/>
+                <a16:creationId xmlns:a16="http://schemas.microsoft.com/office/drawing/2014/main" id="{B12239A5-AF3A-4071-843C-9ED7F65C3269}"/>
               </a:ext>
             </a:extLst>
           </p:cNvPr>
@@ -5511,9 +6056,9 @@
                 </a:solidFill>
                 <a:latin typeface="Arial" panose="020B0604020202020204" pitchFamily="34" charset="0"/>
               </a:rPr>
-              <a:t>Career Mission AI · 6/6</a:t>
-            </a:r>
-            <a:endParaRPr lang="ko-KR" altLang="en-US" sz="900">
+              <a:t>Career Mission AI · 6/9</a:t>
+            </a:r>
+            <a:endParaRPr lang="ko-KR" altLang="en-US" sz="900" dirty="0">
               <a:solidFill>
                 <a:srgbClr val="686472"/>
               </a:solidFill>
@@ -5522,10 +6067,70 @@
           </a:p>
         </p:txBody>
       </p:sp>
+      <p:pic>
+        <p:nvPicPr>
+          <p:cNvPr id="7" name="그림 6">
+            <a:extLst>
+              <a:ext uri="{FF2B5EF4-FFF2-40B4-BE49-F238E27FC236}">
+                <a16:creationId xmlns:a16="http://schemas.microsoft.com/office/drawing/2014/main" id="{94B54DB6-C1B1-E2CB-0C96-455A6BD2BB1C}"/>
+              </a:ext>
+            </a:extLst>
+          </p:cNvPr>
+          <p:cNvPicPr>
+            <a:picLocks noChangeAspect="1"/>
+          </p:cNvPicPr>
+          <p:nvPr/>
+        </p:nvPicPr>
+        <p:blipFill>
+          <a:blip r:embed="rId2"/>
+          <a:stretch>
+            <a:fillRect/>
+          </a:stretch>
+        </p:blipFill>
+        <p:spPr>
+          <a:xfrm>
+            <a:off x="6292516" y="0"/>
+            <a:ext cx="5899484" cy="3658557"/>
+          </a:xfrm>
+          <a:prstGeom prst="rect">
+            <a:avLst/>
+          </a:prstGeom>
+        </p:spPr>
+      </p:pic>
+      <p:pic>
+        <p:nvPicPr>
+          <p:cNvPr id="9" name="그림 8">
+            <a:extLst>
+              <a:ext uri="{FF2B5EF4-FFF2-40B4-BE49-F238E27FC236}">
+                <a16:creationId xmlns:a16="http://schemas.microsoft.com/office/drawing/2014/main" id="{16E9CBD0-AD11-6E71-7A73-AF54998A922C}"/>
+              </a:ext>
+            </a:extLst>
+          </p:cNvPr>
+          <p:cNvPicPr>
+            <a:picLocks noChangeAspect="1"/>
+          </p:cNvPicPr>
+          <p:nvPr/>
+        </p:nvPicPr>
+        <p:blipFill>
+          <a:blip r:embed="rId3"/>
+          <a:stretch>
+            <a:fillRect/>
+          </a:stretch>
+        </p:blipFill>
+        <p:spPr>
+          <a:xfrm>
+            <a:off x="7908211" y="3654898"/>
+            <a:ext cx="4321889" cy="3203102"/>
+          </a:xfrm>
+          <a:prstGeom prst="rect">
+            <a:avLst/>
+          </a:prstGeom>
+        </p:spPr>
+      </p:pic>
     </p:spTree>
     <p:extLst>
       <p:ext uri="{BB962C8B-B14F-4D97-AF65-F5344CB8AC3E}">
-        <p14:creationId xmlns:p14="http://schemas.microsoft.com/office/powerpoint/2010/main" val="802809471"/>
+        <p14:creationId xmlns:p14="http://schemas.microsoft.com/office/powerpoint/2010/main" val="3661328583"/>
       </p:ext>
     </p:extLst>
   </p:cSld>
@@ -5565,7 +6170,7 @@
           <p:cNvPr id="2" name="TextBox 1">
             <a:extLst>
               <a:ext uri="{FF2B5EF4-FFF2-40B4-BE49-F238E27FC236}">
-                <a16:creationId xmlns:a16="http://schemas.microsoft.com/office/drawing/2014/main" id="{FAE48F1C-97A4-F68D-ECEA-1AE3F17FE347}"/>
+                <a16:creationId xmlns:a16="http://schemas.microsoft.com/office/drawing/2014/main" id="{364781B6-DA0E-D7EE-567A-F34875328C4A}"/>
               </a:ext>
             </a:extLst>
           </p:cNvPr>
@@ -5574,8 +6179,8 @@
         </p:nvSpPr>
         <p:spPr>
           <a:xfrm>
-            <a:off x="609600" y="406400"/>
-            <a:ext cx="10922000" cy="523220"/>
+            <a:off x="736600" y="609600"/>
+            <a:ext cx="10668000" cy="553998"/>
           </a:xfrm>
           <a:prstGeom prst="rect">
             <a:avLst/>
@@ -5589,23 +6194,29 @@
           <a:lstStyle/>
           <a:p>
             <a:r>
-              <a:rPr lang="ko-KR" altLang="en-US" sz="2800" b="1">
+              <a:rPr lang="ko-KR" altLang="en-US" sz="3000" b="1">
                 <a:solidFill>
                   <a:srgbClr val="0F1716"/>
                 </a:solidFill>
                 <a:latin typeface="맑은 고딕" panose="020B0503020000020004" pitchFamily="50" charset="-127"/>
               </a:rPr>
-              <a:t>인증 흐름도</a:t>
-            </a:r>
-          </a:p>
-        </p:txBody>
-      </p:sp>
-      <p:sp>
-        <p:nvSpPr>
-          <p:cNvPr id="3" name="사각형: 둥근 모서리 2">
-            <a:extLst>
-              <a:ext uri="{FF2B5EF4-FFF2-40B4-BE49-F238E27FC236}">
-                <a16:creationId xmlns:a16="http://schemas.microsoft.com/office/drawing/2014/main" id="{7EF33B35-035D-A394-50B6-5BB65BA483F6}"/>
+              <a:t>다음 과제</a:t>
+            </a:r>
+            <a:endParaRPr lang="ko-KR" altLang="en-US" sz="3000" b="1" dirty="0">
+              <a:solidFill>
+                <a:srgbClr val="0F1716"/>
+              </a:solidFill>
+              <a:latin typeface="맑은 고딕" panose="020B0503020000020004" pitchFamily="50" charset="-127"/>
+            </a:endParaRPr>
+          </a:p>
+        </p:txBody>
+      </p:sp>
+      <p:sp>
+        <p:nvSpPr>
+          <p:cNvPr id="3" name="직사각형 2">
+            <a:extLst>
+              <a:ext uri="{FF2B5EF4-FFF2-40B4-BE49-F238E27FC236}">
+                <a16:creationId xmlns:a16="http://schemas.microsoft.com/office/drawing/2014/main" id="{1F206F41-66F4-DBC7-6B11-41B22097DB9C}"/>
               </a:ext>
             </a:extLst>
           </p:cNvPr>
@@ -5614,10 +6225,10 @@
         </p:nvSpPr>
         <p:spPr>
           <a:xfrm>
-            <a:off x="571500" y="2349500"/>
-            <a:ext cx="1333500" cy="889000"/>
-          </a:xfrm>
-          <a:prstGeom prst="roundRect">
+            <a:off x="736600" y="1752600"/>
+            <a:ext cx="10718800" cy="3238500"/>
+          </a:xfrm>
+          <a:prstGeom prst="rect">
             <a:avLst/>
           </a:prstGeom>
           <a:solidFill>
@@ -5646,670 +6257,20 @@
           </a:fontRef>
         </p:style>
         <p:txBody>
-          <a:bodyPr rtlCol="0" anchor="ctr" anchorCtr="1"/>
+          <a:bodyPr rtlCol="0" anchor="ctr"/>
           <a:lstStyle/>
           <a:p>
             <a:pPr algn="ctr"/>
-            <a:r>
-              <a:rPr lang="ko-KR" altLang="en-US" sz="1400" b="1">
-                <a:solidFill>
-                  <a:srgbClr val="0F1716"/>
-                </a:solidFill>
-                <a:latin typeface="맑은 고딕" panose="020B0503020000020004" pitchFamily="50" charset="-127"/>
-              </a:rPr>
-              <a:t>회원가입 입력</a:t>
-            </a:r>
-          </a:p>
-        </p:txBody>
-      </p:sp>
-      <p:cxnSp>
-        <p:nvCxnSpPr>
-          <p:cNvPr id="4" name="직선 화살표 연결선 3">
-            <a:extLst>
-              <a:ext uri="{FF2B5EF4-FFF2-40B4-BE49-F238E27FC236}">
-                <a16:creationId xmlns:a16="http://schemas.microsoft.com/office/drawing/2014/main" id="{317B4170-C362-9649-4D7F-5900E174E367}"/>
-              </a:ext>
-            </a:extLst>
-          </p:cNvPr>
-          <p:cNvCxnSpPr/>
-          <p:nvPr/>
-        </p:nvCxnSpPr>
-        <p:spPr>
-          <a:xfrm>
-            <a:off x="1905000" y="2794000"/>
-            <a:ext cx="317500" cy="0"/>
-          </a:xfrm>
-          <a:prstGeom prst="straightConnector1">
-            <a:avLst/>
-          </a:prstGeom>
-          <a:ln w="27940">
-            <a:solidFill>
-              <a:srgbClr val="228317"/>
-            </a:solidFill>
-            <a:tailEnd type="arrow"/>
-          </a:ln>
-        </p:spPr>
-        <p:style>
-          <a:lnRef idx="1">
-            <a:schemeClr val="accent1"/>
-          </a:lnRef>
-          <a:fillRef idx="0">
-            <a:schemeClr val="accent1"/>
-          </a:fillRef>
-          <a:effectRef idx="0">
-            <a:schemeClr val="accent1"/>
-          </a:effectRef>
-          <a:fontRef idx="minor">
-            <a:schemeClr val="tx1"/>
-          </a:fontRef>
-        </p:style>
-      </p:cxnSp>
-      <p:sp>
-        <p:nvSpPr>
-          <p:cNvPr id="5" name="사각형: 둥근 모서리 4">
-            <a:extLst>
-              <a:ext uri="{FF2B5EF4-FFF2-40B4-BE49-F238E27FC236}">
-                <a16:creationId xmlns:a16="http://schemas.microsoft.com/office/drawing/2014/main" id="{88E88C1A-20AE-CCF7-0897-C678AA395845}"/>
-              </a:ext>
-            </a:extLst>
-          </p:cNvPr>
-          <p:cNvSpPr/>
-          <p:nvPr/>
-        </p:nvSpPr>
-        <p:spPr>
-          <a:xfrm>
-            <a:off x="2222500" y="2349500"/>
-            <a:ext cx="1333500" cy="889000"/>
-          </a:xfrm>
-          <a:prstGeom prst="roundRect">
-            <a:avLst/>
-          </a:prstGeom>
-          <a:solidFill>
-            <a:srgbClr val="FFFFFF"/>
-          </a:solidFill>
-          <a:ln>
-            <a:solidFill>
-              <a:srgbClr val="E0E0E0"/>
-            </a:solidFill>
-          </a:ln>
-        </p:spPr>
-        <p:style>
-          <a:lnRef idx="2">
-            <a:schemeClr val="accent1">
-              <a:shade val="15000"/>
-            </a:schemeClr>
-          </a:lnRef>
-          <a:fillRef idx="1">
-            <a:schemeClr val="accent1"/>
-          </a:fillRef>
-          <a:effectRef idx="0">
-            <a:schemeClr val="accent1"/>
-          </a:effectRef>
-          <a:fontRef idx="minor">
-            <a:schemeClr val="lt1"/>
-          </a:fontRef>
-        </p:style>
-        <p:txBody>
-          <a:bodyPr rtlCol="0" anchor="ctr" anchorCtr="1"/>
-          <a:lstStyle/>
-          <a:p>
-            <a:pPr algn="ctr"/>
-            <a:r>
-              <a:rPr lang="en-US" altLang="ko-KR" sz="1400" b="1">
-                <a:solidFill>
-                  <a:srgbClr val="0F1716"/>
-                </a:solidFill>
-                <a:latin typeface="맑은 고딕" panose="020B0503020000020004" pitchFamily="50" charset="-127"/>
-              </a:rPr>
-              <a:t>DB </a:t>
-            </a:r>
-            <a:r>
-              <a:rPr lang="ko-KR" altLang="en-US" sz="1400" b="1">
-                <a:solidFill>
-                  <a:srgbClr val="0F1716"/>
-                </a:solidFill>
-                <a:latin typeface="맑은 고딕" panose="020B0503020000020004" pitchFamily="50" charset="-127"/>
-              </a:rPr>
-              <a:t>저장</a:t>
-            </a:r>
-          </a:p>
-        </p:txBody>
-      </p:sp>
-      <p:cxnSp>
-        <p:nvCxnSpPr>
-          <p:cNvPr id="6" name="직선 화살표 연결선 5">
-            <a:extLst>
-              <a:ext uri="{FF2B5EF4-FFF2-40B4-BE49-F238E27FC236}">
-                <a16:creationId xmlns:a16="http://schemas.microsoft.com/office/drawing/2014/main" id="{BCC47DC6-A868-FFD5-C8F4-6D33D0107815}"/>
-              </a:ext>
-            </a:extLst>
-          </p:cNvPr>
-          <p:cNvCxnSpPr/>
-          <p:nvPr/>
-        </p:nvCxnSpPr>
-        <p:spPr>
-          <a:xfrm>
-            <a:off x="3556000" y="2794000"/>
-            <a:ext cx="317500" cy="0"/>
-          </a:xfrm>
-          <a:prstGeom prst="straightConnector1">
-            <a:avLst/>
-          </a:prstGeom>
-          <a:ln w="27940">
-            <a:solidFill>
-              <a:srgbClr val="228317"/>
-            </a:solidFill>
-            <a:tailEnd type="arrow"/>
-          </a:ln>
-        </p:spPr>
-        <p:style>
-          <a:lnRef idx="1">
-            <a:schemeClr val="accent1"/>
-          </a:lnRef>
-          <a:fillRef idx="0">
-            <a:schemeClr val="accent1"/>
-          </a:fillRef>
-          <a:effectRef idx="0">
-            <a:schemeClr val="accent1"/>
-          </a:effectRef>
-          <a:fontRef idx="minor">
-            <a:schemeClr val="tx1"/>
-          </a:fontRef>
-        </p:style>
-      </p:cxnSp>
-      <p:sp>
-        <p:nvSpPr>
-          <p:cNvPr id="7" name="사각형: 둥근 모서리 6">
-            <a:extLst>
-              <a:ext uri="{FF2B5EF4-FFF2-40B4-BE49-F238E27FC236}">
-                <a16:creationId xmlns:a16="http://schemas.microsoft.com/office/drawing/2014/main" id="{FA8BD842-48DE-C655-355D-DC908ACC7914}"/>
-              </a:ext>
-            </a:extLst>
-          </p:cNvPr>
-          <p:cNvSpPr/>
-          <p:nvPr/>
-        </p:nvSpPr>
-        <p:spPr>
-          <a:xfrm>
-            <a:off x="3873500" y="2349500"/>
-            <a:ext cx="1333500" cy="889000"/>
-          </a:xfrm>
-          <a:prstGeom prst="roundRect">
-            <a:avLst/>
-          </a:prstGeom>
-          <a:solidFill>
-            <a:srgbClr val="FFFFFF"/>
-          </a:solidFill>
-          <a:ln>
-            <a:solidFill>
-              <a:srgbClr val="E0E0E0"/>
-            </a:solidFill>
-          </a:ln>
-        </p:spPr>
-        <p:style>
-          <a:lnRef idx="2">
-            <a:schemeClr val="accent1">
-              <a:shade val="15000"/>
-            </a:schemeClr>
-          </a:lnRef>
-          <a:fillRef idx="1">
-            <a:schemeClr val="accent1"/>
-          </a:fillRef>
-          <a:effectRef idx="0">
-            <a:schemeClr val="accent1"/>
-          </a:effectRef>
-          <a:fontRef idx="minor">
-            <a:schemeClr val="lt1"/>
-          </a:fontRef>
-        </p:style>
-        <p:txBody>
-          <a:bodyPr rtlCol="0" anchor="ctr" anchorCtr="1"/>
-          <a:lstStyle/>
-          <a:p>
-            <a:pPr algn="ctr"/>
-            <a:r>
-              <a:rPr lang="ko-KR" altLang="en-US" sz="1400" b="1">
-                <a:solidFill>
-                  <a:srgbClr val="0F1716"/>
-                </a:solidFill>
-                <a:latin typeface="맑은 고딕" panose="020B0503020000020004" pitchFamily="50" charset="-127"/>
-              </a:rPr>
-              <a:t>인증 메일 발송</a:t>
-            </a:r>
-          </a:p>
-        </p:txBody>
-      </p:sp>
-      <p:cxnSp>
-        <p:nvCxnSpPr>
-          <p:cNvPr id="8" name="직선 화살표 연결선 7">
-            <a:extLst>
-              <a:ext uri="{FF2B5EF4-FFF2-40B4-BE49-F238E27FC236}">
-                <a16:creationId xmlns:a16="http://schemas.microsoft.com/office/drawing/2014/main" id="{71553CF1-DD1C-AFE3-8DD4-7513D2457E37}"/>
-              </a:ext>
-            </a:extLst>
-          </p:cNvPr>
-          <p:cNvCxnSpPr/>
-          <p:nvPr/>
-        </p:nvCxnSpPr>
-        <p:spPr>
-          <a:xfrm>
-            <a:off x="5207000" y="2794000"/>
-            <a:ext cx="317500" cy="0"/>
-          </a:xfrm>
-          <a:prstGeom prst="straightConnector1">
-            <a:avLst/>
-          </a:prstGeom>
-          <a:ln w="27940">
-            <a:solidFill>
-              <a:srgbClr val="228317"/>
-            </a:solidFill>
-            <a:tailEnd type="arrow"/>
-          </a:ln>
-        </p:spPr>
-        <p:style>
-          <a:lnRef idx="1">
-            <a:schemeClr val="accent1"/>
-          </a:lnRef>
-          <a:fillRef idx="0">
-            <a:schemeClr val="accent1"/>
-          </a:fillRef>
-          <a:effectRef idx="0">
-            <a:schemeClr val="accent1"/>
-          </a:effectRef>
-          <a:fontRef idx="minor">
-            <a:schemeClr val="tx1"/>
-          </a:fontRef>
-        </p:style>
-      </p:cxnSp>
-      <p:sp>
-        <p:nvSpPr>
-          <p:cNvPr id="9" name="사각형: 둥근 모서리 8">
-            <a:extLst>
-              <a:ext uri="{FF2B5EF4-FFF2-40B4-BE49-F238E27FC236}">
-                <a16:creationId xmlns:a16="http://schemas.microsoft.com/office/drawing/2014/main" id="{FA0D759B-72C9-2BB7-D2C2-DEAD1408A5F2}"/>
-              </a:ext>
-            </a:extLst>
-          </p:cNvPr>
-          <p:cNvSpPr/>
-          <p:nvPr/>
-        </p:nvSpPr>
-        <p:spPr>
-          <a:xfrm>
-            <a:off x="5524500" y="2349500"/>
-            <a:ext cx="1333500" cy="889000"/>
-          </a:xfrm>
-          <a:prstGeom prst="roundRect">
-            <a:avLst/>
-          </a:prstGeom>
-          <a:solidFill>
-            <a:srgbClr val="FFFFFF"/>
-          </a:solidFill>
-          <a:ln>
-            <a:solidFill>
-              <a:srgbClr val="E0E0E0"/>
-            </a:solidFill>
-          </a:ln>
-        </p:spPr>
-        <p:style>
-          <a:lnRef idx="2">
-            <a:schemeClr val="accent1">
-              <a:shade val="15000"/>
-            </a:schemeClr>
-          </a:lnRef>
-          <a:fillRef idx="1">
-            <a:schemeClr val="accent1"/>
-          </a:fillRef>
-          <a:effectRef idx="0">
-            <a:schemeClr val="accent1"/>
-          </a:effectRef>
-          <a:fontRef idx="minor">
-            <a:schemeClr val="lt1"/>
-          </a:fontRef>
-        </p:style>
-        <p:txBody>
-          <a:bodyPr rtlCol="0" anchor="ctr" anchorCtr="1"/>
-          <a:lstStyle/>
-          <a:p>
-            <a:pPr algn="ctr"/>
-            <a:r>
-              <a:rPr lang="ko-KR" altLang="en-US" sz="1400" b="1">
-                <a:solidFill>
-                  <a:srgbClr val="0F1716"/>
-                </a:solidFill>
-                <a:latin typeface="맑은 고딕" panose="020B0503020000020004" pitchFamily="50" charset="-127"/>
-              </a:rPr>
-              <a:t>이메일 인증</a:t>
-            </a:r>
-          </a:p>
-        </p:txBody>
-      </p:sp>
-      <p:cxnSp>
-        <p:nvCxnSpPr>
-          <p:cNvPr id="10" name="직선 화살표 연결선 9">
-            <a:extLst>
-              <a:ext uri="{FF2B5EF4-FFF2-40B4-BE49-F238E27FC236}">
-                <a16:creationId xmlns:a16="http://schemas.microsoft.com/office/drawing/2014/main" id="{AC4F6919-8E1A-ED4D-95D0-81566ABBF8E4}"/>
-              </a:ext>
-            </a:extLst>
-          </p:cNvPr>
-          <p:cNvCxnSpPr/>
-          <p:nvPr/>
-        </p:nvCxnSpPr>
-        <p:spPr>
-          <a:xfrm>
-            <a:off x="6858000" y="2794000"/>
-            <a:ext cx="317500" cy="0"/>
-          </a:xfrm>
-          <a:prstGeom prst="straightConnector1">
-            <a:avLst/>
-          </a:prstGeom>
-          <a:ln w="27940">
-            <a:solidFill>
-              <a:srgbClr val="228317"/>
-            </a:solidFill>
-            <a:tailEnd type="arrow"/>
-          </a:ln>
-        </p:spPr>
-        <p:style>
-          <a:lnRef idx="1">
-            <a:schemeClr val="accent1"/>
-          </a:lnRef>
-          <a:fillRef idx="0">
-            <a:schemeClr val="accent1"/>
-          </a:fillRef>
-          <a:effectRef idx="0">
-            <a:schemeClr val="accent1"/>
-          </a:effectRef>
-          <a:fontRef idx="minor">
-            <a:schemeClr val="tx1"/>
-          </a:fontRef>
-        </p:style>
-      </p:cxnSp>
-      <p:sp>
-        <p:nvSpPr>
-          <p:cNvPr id="11" name="사각형: 둥근 모서리 10">
-            <a:extLst>
-              <a:ext uri="{FF2B5EF4-FFF2-40B4-BE49-F238E27FC236}">
-                <a16:creationId xmlns:a16="http://schemas.microsoft.com/office/drawing/2014/main" id="{F9E654B9-272D-E12D-5BEF-39558E106AE0}"/>
-              </a:ext>
-            </a:extLst>
-          </p:cNvPr>
-          <p:cNvSpPr/>
-          <p:nvPr/>
-        </p:nvSpPr>
-        <p:spPr>
-          <a:xfrm>
-            <a:off x="7175500" y="2349500"/>
-            <a:ext cx="1333500" cy="889000"/>
-          </a:xfrm>
-          <a:prstGeom prst="roundRect">
-            <a:avLst/>
-          </a:prstGeom>
-          <a:solidFill>
-            <a:srgbClr val="FFFFFF"/>
-          </a:solidFill>
-          <a:ln>
-            <a:solidFill>
-              <a:srgbClr val="E0E0E0"/>
-            </a:solidFill>
-          </a:ln>
-        </p:spPr>
-        <p:style>
-          <a:lnRef idx="2">
-            <a:schemeClr val="accent1">
-              <a:shade val="15000"/>
-            </a:schemeClr>
-          </a:lnRef>
-          <a:fillRef idx="1">
-            <a:schemeClr val="accent1"/>
-          </a:fillRef>
-          <a:effectRef idx="0">
-            <a:schemeClr val="accent1"/>
-          </a:effectRef>
-          <a:fontRef idx="minor">
-            <a:schemeClr val="lt1"/>
-          </a:fontRef>
-        </p:style>
-        <p:txBody>
-          <a:bodyPr rtlCol="0" anchor="ctr" anchorCtr="1"/>
-          <a:lstStyle/>
-          <a:p>
-            <a:pPr algn="ctr"/>
-            <a:r>
-              <a:rPr lang="ko-KR" altLang="en-US" sz="1400" b="1">
-                <a:solidFill>
-                  <a:srgbClr val="0F1716"/>
-                </a:solidFill>
-                <a:latin typeface="맑은 고딕" panose="020B0503020000020004" pitchFamily="50" charset="-127"/>
-              </a:rPr>
-              <a:t>로그인</a:t>
-            </a:r>
-          </a:p>
-        </p:txBody>
-      </p:sp>
-      <p:cxnSp>
-        <p:nvCxnSpPr>
-          <p:cNvPr id="12" name="직선 화살표 연결선 11">
-            <a:extLst>
-              <a:ext uri="{FF2B5EF4-FFF2-40B4-BE49-F238E27FC236}">
-                <a16:creationId xmlns:a16="http://schemas.microsoft.com/office/drawing/2014/main" id="{D923C259-0FC2-EF4B-3B9E-3E28E6E6D87B}"/>
-              </a:ext>
-            </a:extLst>
-          </p:cNvPr>
-          <p:cNvCxnSpPr/>
-          <p:nvPr/>
-        </p:nvCxnSpPr>
-        <p:spPr>
-          <a:xfrm>
-            <a:off x="8509000" y="2794000"/>
-            <a:ext cx="317500" cy="0"/>
-          </a:xfrm>
-          <a:prstGeom prst="straightConnector1">
-            <a:avLst/>
-          </a:prstGeom>
-          <a:ln w="27940">
-            <a:solidFill>
-              <a:srgbClr val="228317"/>
-            </a:solidFill>
-            <a:tailEnd type="arrow"/>
-          </a:ln>
-        </p:spPr>
-        <p:style>
-          <a:lnRef idx="1">
-            <a:schemeClr val="accent1"/>
-          </a:lnRef>
-          <a:fillRef idx="0">
-            <a:schemeClr val="accent1"/>
-          </a:fillRef>
-          <a:effectRef idx="0">
-            <a:schemeClr val="accent1"/>
-          </a:effectRef>
-          <a:fontRef idx="minor">
-            <a:schemeClr val="tx1"/>
-          </a:fontRef>
-        </p:style>
-      </p:cxnSp>
-      <p:sp>
-        <p:nvSpPr>
-          <p:cNvPr id="13" name="사각형: 둥근 모서리 12">
-            <a:extLst>
-              <a:ext uri="{FF2B5EF4-FFF2-40B4-BE49-F238E27FC236}">
-                <a16:creationId xmlns:a16="http://schemas.microsoft.com/office/drawing/2014/main" id="{0645B250-5398-D5F2-FDBB-439B8D8C13D8}"/>
-              </a:ext>
-            </a:extLst>
-          </p:cNvPr>
-          <p:cNvSpPr/>
-          <p:nvPr/>
-        </p:nvSpPr>
-        <p:spPr>
-          <a:xfrm>
-            <a:off x="8826500" y="2349500"/>
-            <a:ext cx="1333500" cy="889000"/>
-          </a:xfrm>
-          <a:prstGeom prst="roundRect">
-            <a:avLst/>
-          </a:prstGeom>
-          <a:solidFill>
-            <a:srgbClr val="FFFFFF"/>
-          </a:solidFill>
-          <a:ln>
-            <a:solidFill>
-              <a:srgbClr val="E0E0E0"/>
-            </a:solidFill>
-          </a:ln>
-        </p:spPr>
-        <p:style>
-          <a:lnRef idx="2">
-            <a:schemeClr val="accent1">
-              <a:shade val="15000"/>
-            </a:schemeClr>
-          </a:lnRef>
-          <a:fillRef idx="1">
-            <a:schemeClr val="accent1"/>
-          </a:fillRef>
-          <a:effectRef idx="0">
-            <a:schemeClr val="accent1"/>
-          </a:effectRef>
-          <a:fontRef idx="minor">
-            <a:schemeClr val="lt1"/>
-          </a:fontRef>
-        </p:style>
-        <p:txBody>
-          <a:bodyPr rtlCol="0" anchor="ctr" anchorCtr="1"/>
-          <a:lstStyle/>
-          <a:p>
-            <a:pPr algn="ctr"/>
-            <a:r>
-              <a:rPr lang="en-US" altLang="ko-KR" sz="1400" b="1">
-                <a:solidFill>
-                  <a:srgbClr val="0F1716"/>
-                </a:solidFill>
-                <a:latin typeface="맑은 고딕" panose="020B0503020000020004" pitchFamily="50" charset="-127"/>
-              </a:rPr>
-              <a:t>JWT </a:t>
-            </a:r>
-            <a:r>
-              <a:rPr lang="ko-KR" altLang="en-US" sz="1400" b="1">
-                <a:solidFill>
-                  <a:srgbClr val="0F1716"/>
-                </a:solidFill>
-                <a:latin typeface="맑은 고딕" panose="020B0503020000020004" pitchFamily="50" charset="-127"/>
-              </a:rPr>
-              <a:t>발급</a:t>
-            </a:r>
-          </a:p>
-        </p:txBody>
-      </p:sp>
-      <p:cxnSp>
-        <p:nvCxnSpPr>
-          <p:cNvPr id="14" name="직선 화살표 연결선 13">
-            <a:extLst>
-              <a:ext uri="{FF2B5EF4-FFF2-40B4-BE49-F238E27FC236}">
-                <a16:creationId xmlns:a16="http://schemas.microsoft.com/office/drawing/2014/main" id="{95462BF2-8590-1029-F61C-3FA8AF961D1F}"/>
-              </a:ext>
-            </a:extLst>
-          </p:cNvPr>
-          <p:cNvCxnSpPr/>
-          <p:nvPr/>
-        </p:nvCxnSpPr>
-        <p:spPr>
-          <a:xfrm>
-            <a:off x="10160000" y="2794000"/>
-            <a:ext cx="317500" cy="0"/>
-          </a:xfrm>
-          <a:prstGeom prst="straightConnector1">
-            <a:avLst/>
-          </a:prstGeom>
-          <a:ln w="27940">
-            <a:solidFill>
-              <a:srgbClr val="228317"/>
-            </a:solidFill>
-            <a:tailEnd type="arrow"/>
-          </a:ln>
-        </p:spPr>
-        <p:style>
-          <a:lnRef idx="1">
-            <a:schemeClr val="accent1"/>
-          </a:lnRef>
-          <a:fillRef idx="0">
-            <a:schemeClr val="accent1"/>
-          </a:fillRef>
-          <a:effectRef idx="0">
-            <a:schemeClr val="accent1"/>
-          </a:effectRef>
-          <a:fontRef idx="minor">
-            <a:schemeClr val="tx1"/>
-          </a:fontRef>
-        </p:style>
-      </p:cxnSp>
-      <p:sp>
-        <p:nvSpPr>
-          <p:cNvPr id="15" name="사각형: 둥근 모서리 14">
-            <a:extLst>
-              <a:ext uri="{FF2B5EF4-FFF2-40B4-BE49-F238E27FC236}">
-                <a16:creationId xmlns:a16="http://schemas.microsoft.com/office/drawing/2014/main" id="{84296210-0938-3E55-B273-5F3BDE19EEA6}"/>
-              </a:ext>
-            </a:extLst>
-          </p:cNvPr>
-          <p:cNvSpPr/>
-          <p:nvPr/>
-        </p:nvSpPr>
-        <p:spPr>
-          <a:xfrm>
-            <a:off x="10477500" y="2349500"/>
-            <a:ext cx="1333500" cy="889000"/>
-          </a:xfrm>
-          <a:prstGeom prst="roundRect">
-            <a:avLst/>
-          </a:prstGeom>
-          <a:solidFill>
-            <a:srgbClr val="FFFFFF"/>
-          </a:solidFill>
-          <a:ln>
-            <a:solidFill>
-              <a:srgbClr val="E0E0E0"/>
-            </a:solidFill>
-          </a:ln>
-        </p:spPr>
-        <p:style>
-          <a:lnRef idx="2">
-            <a:schemeClr val="accent1">
-              <a:shade val="15000"/>
-            </a:schemeClr>
-          </a:lnRef>
-          <a:fillRef idx="1">
-            <a:schemeClr val="accent1"/>
-          </a:fillRef>
-          <a:effectRef idx="0">
-            <a:schemeClr val="accent1"/>
-          </a:effectRef>
-          <a:fontRef idx="minor">
-            <a:schemeClr val="lt1"/>
-          </a:fontRef>
-        </p:style>
-        <p:txBody>
-          <a:bodyPr rtlCol="0" anchor="ctr" anchorCtr="1"/>
-          <a:lstStyle/>
-          <a:p>
-            <a:pPr algn="ctr"/>
-            <a:r>
-              <a:rPr lang="ko-KR" altLang="en-US" sz="1400" b="1">
-                <a:solidFill>
-                  <a:srgbClr val="0F1716"/>
-                </a:solidFill>
-                <a:latin typeface="맑은 고딕" panose="020B0503020000020004" pitchFamily="50" charset="-127"/>
-              </a:rPr>
-              <a:t>보호 페이지 접근</a:t>
-            </a:r>
-          </a:p>
-        </p:txBody>
-      </p:sp>
-      <p:sp>
-        <p:nvSpPr>
-          <p:cNvPr id="16" name="TextBox 15">
-            <a:extLst>
-              <a:ext uri="{FF2B5EF4-FFF2-40B4-BE49-F238E27FC236}">
-                <a16:creationId xmlns:a16="http://schemas.microsoft.com/office/drawing/2014/main" id="{FB857C14-AB50-77E5-5A89-2DA075491007}"/>
+            <a:endParaRPr lang="ko-KR" altLang="en-US"/>
+          </a:p>
+        </p:txBody>
+      </p:sp>
+      <p:sp>
+        <p:nvSpPr>
+          <p:cNvPr id="4" name="TextBox 3">
+            <a:extLst>
+              <a:ext uri="{FF2B5EF4-FFF2-40B4-BE49-F238E27FC236}">
+                <a16:creationId xmlns:a16="http://schemas.microsoft.com/office/drawing/2014/main" id="{BB047DBB-09ED-F937-4DF0-2FB3D2668D3D}"/>
               </a:ext>
             </a:extLst>
           </p:cNvPr>
@@ -6318,8 +6279,8 @@
         </p:nvSpPr>
         <p:spPr>
           <a:xfrm>
-            <a:off x="1117600" y="4064000"/>
-            <a:ext cx="9906000" cy="276999"/>
+            <a:off x="1143000" y="3041714"/>
+            <a:ext cx="9906000" cy="774571"/>
           </a:xfrm>
           <a:prstGeom prst="rect">
             <a:avLst/>
@@ -6332,99 +6293,129 @@
           </a:bodyPr>
           <a:lstStyle/>
           <a:p>
-            <a:r>
-              <a:rPr lang="ko-KR" altLang="en-US" sz="1200">
-                <a:solidFill>
-                  <a:srgbClr val="4C4C4C"/>
-                </a:solidFill>
-                <a:latin typeface="맑은 고딕" panose="020B0503020000020004" pitchFamily="50" charset="-127"/>
-              </a:rPr>
-              <a:t>핵심</a:t>
-            </a:r>
-            <a:r>
-              <a:rPr lang="en-US" altLang="ko-KR" sz="1200">
-                <a:solidFill>
-                  <a:srgbClr val="4C4C4C"/>
+            <a:pPr>
+              <a:spcAft>
+                <a:spcPts val="1000"/>
+              </a:spcAft>
+            </a:pPr>
+            <a:r>
+              <a:rPr lang="en-US" altLang="ko-KR">
+                <a:solidFill>
+                  <a:srgbClr val="343434"/>
+                </a:solidFill>
+                <a:latin typeface="맑은 고딕" panose="020B0503020000020004" pitchFamily="50" charset="-127"/>
+              </a:rPr>
+              <a:t>• </a:t>
+            </a:r>
+            <a:r>
+              <a:rPr lang="ko-KR" altLang="en-US">
+                <a:solidFill>
+                  <a:srgbClr val="343434"/>
+                </a:solidFill>
+                <a:latin typeface="맑은 고딕" panose="020B0503020000020004" pitchFamily="50" charset="-127"/>
+              </a:rPr>
+              <a:t>다음 과제</a:t>
+            </a:r>
+            <a:r>
+              <a:rPr lang="en-US" altLang="ko-KR">
+                <a:solidFill>
+                  <a:srgbClr val="343434"/>
                 </a:solidFill>
                 <a:latin typeface="맑은 고딕" panose="020B0503020000020004" pitchFamily="50" charset="-127"/>
               </a:rPr>
               <a:t>: </a:t>
             </a:r>
             <a:r>
-              <a:rPr lang="ko-KR" altLang="en-US" sz="1200">
-                <a:solidFill>
-                  <a:srgbClr val="4C4C4C"/>
-                </a:solidFill>
-                <a:latin typeface="맑은 고딕" panose="020B0503020000020004" pitchFamily="50" charset="-127"/>
-              </a:rPr>
-              <a:t>인증 전 사용자는 로그인할 수 없고</a:t>
-            </a:r>
-            <a:r>
-              <a:rPr lang="en-US" altLang="ko-KR" sz="1200">
-                <a:solidFill>
-                  <a:srgbClr val="4C4C4C"/>
-                </a:solidFill>
-                <a:latin typeface="맑은 고딕" panose="020B0503020000020004" pitchFamily="50" charset="-127"/>
-              </a:rPr>
-              <a:t>, </a:t>
-            </a:r>
-            <a:r>
-              <a:rPr lang="ko-KR" altLang="en-US" sz="1200">
-                <a:solidFill>
-                  <a:srgbClr val="4C4C4C"/>
-                </a:solidFill>
-                <a:latin typeface="맑은 고딕" panose="020B0503020000020004" pitchFamily="50" charset="-127"/>
-              </a:rPr>
-              <a:t>로그인 후 받은 </a:t>
-            </a:r>
-            <a:r>
-              <a:rPr lang="en-US" altLang="ko-KR" sz="1200">
-                <a:solidFill>
-                  <a:srgbClr val="4C4C4C"/>
-                </a:solidFill>
-                <a:latin typeface="맑은 고딕" panose="020B0503020000020004" pitchFamily="50" charset="-127"/>
-              </a:rPr>
-              <a:t>JWT</a:t>
-            </a:r>
-            <a:r>
-              <a:rPr lang="ko-KR" altLang="en-US" sz="1200">
-                <a:solidFill>
-                  <a:srgbClr val="4C4C4C"/>
-                </a:solidFill>
-                <a:latin typeface="맑은 고딕" panose="020B0503020000020004" pitchFamily="50" charset="-127"/>
-              </a:rPr>
-              <a:t>로 보호 페이지와 보호 </a:t>
-            </a:r>
-            <a:r>
-              <a:rPr lang="en-US" altLang="ko-KR" sz="1200">
-                <a:solidFill>
-                  <a:srgbClr val="4C4C4C"/>
-                </a:solidFill>
-                <a:latin typeface="맑은 고딕" panose="020B0503020000020004" pitchFamily="50" charset="-127"/>
-              </a:rPr>
-              <a:t>API</a:t>
-            </a:r>
-            <a:r>
-              <a:rPr lang="ko-KR" altLang="en-US" sz="1200">
-                <a:solidFill>
-                  <a:srgbClr val="4C4C4C"/>
-                </a:solidFill>
-                <a:latin typeface="맑은 고딕" panose="020B0503020000020004" pitchFamily="50" charset="-127"/>
-              </a:rPr>
-              <a:t>에 접근합니다</a:t>
-            </a:r>
-            <a:r>
-              <a:rPr lang="en-US" altLang="ko-KR" sz="1200">
-                <a:solidFill>
-                  <a:srgbClr val="4C4C4C"/>
-                </a:solidFill>
-                <a:latin typeface="맑은 고딕" panose="020B0503020000020004" pitchFamily="50" charset="-127"/>
-              </a:rPr>
-              <a:t>.</a:t>
-            </a:r>
-            <a:endParaRPr lang="ko-KR" altLang="en-US" sz="1200">
+              <a:rPr lang="ko-KR" altLang="en-US">
+                <a:solidFill>
+                  <a:srgbClr val="343434"/>
+                </a:solidFill>
+                <a:latin typeface="맑은 고딕" panose="020B0503020000020004" pitchFamily="50" charset="-127"/>
+              </a:rPr>
+              <a:t>실제 </a:t>
+            </a:r>
+            <a:r>
+              <a:rPr lang="en-US" altLang="ko-KR">
+                <a:solidFill>
+                  <a:srgbClr val="343434"/>
+                </a:solidFill>
+                <a:latin typeface="맑은 고딕" panose="020B0503020000020004" pitchFamily="50" charset="-127"/>
+              </a:rPr>
+              <a:t>SMTP </a:t>
+            </a:r>
+            <a:r>
+              <a:rPr lang="ko-KR" altLang="en-US">
+                <a:solidFill>
+                  <a:srgbClr val="343434"/>
+                </a:solidFill>
+                <a:latin typeface="맑은 고딕" panose="020B0503020000020004" pitchFamily="50" charset="-127"/>
+              </a:rPr>
+              <a:t>발송 검증</a:t>
+            </a:r>
+          </a:p>
+          <a:p>
+            <a:pPr>
+              <a:spcAft>
+                <a:spcPts val="1000"/>
+              </a:spcAft>
+            </a:pPr>
+            <a:r>
+              <a:rPr lang="en-US" altLang="ko-KR">
+                <a:solidFill>
+                  <a:srgbClr val="343434"/>
+                </a:solidFill>
+                <a:latin typeface="맑은 고딕" panose="020B0503020000020004" pitchFamily="50" charset="-127"/>
+              </a:rPr>
+              <a:t>• </a:t>
+            </a:r>
+            <a:r>
+              <a:rPr lang="ko-KR" altLang="en-US">
+                <a:solidFill>
+                  <a:srgbClr val="343434"/>
+                </a:solidFill>
+                <a:latin typeface="맑은 고딕" panose="020B0503020000020004" pitchFamily="50" charset="-127"/>
+              </a:rPr>
+              <a:t>다음 과제</a:t>
+            </a:r>
+            <a:r>
+              <a:rPr lang="en-US" altLang="ko-KR">
+                <a:solidFill>
+                  <a:srgbClr val="343434"/>
+                </a:solidFill>
+                <a:latin typeface="맑은 고딕" panose="020B0503020000020004" pitchFamily="50" charset="-127"/>
+              </a:rPr>
+              <a:t>: </a:t>
+            </a:r>
+            <a:r>
+              <a:rPr lang="ko-KR" altLang="en-US">
+                <a:solidFill>
+                  <a:srgbClr val="343434"/>
+                </a:solidFill>
+                <a:latin typeface="맑은 고딕" panose="020B0503020000020004" pitchFamily="50" charset="-127"/>
+              </a:rPr>
+              <a:t>미션 진행과 결과물 업로드 </a:t>
+            </a:r>
+            <a:r>
+              <a:rPr lang="en-US" altLang="ko-KR">
+                <a:solidFill>
+                  <a:srgbClr val="343434"/>
+                </a:solidFill>
+                <a:latin typeface="맑은 고딕" panose="020B0503020000020004" pitchFamily="50" charset="-127"/>
+              </a:rPr>
+              <a:t>API </a:t>
+            </a:r>
+            <a:r>
+              <a:rPr lang="ko-KR" altLang="en-US">
+                <a:solidFill>
+                  <a:srgbClr val="343434"/>
+                </a:solidFill>
+                <a:latin typeface="맑은 고딕" panose="020B0503020000020004" pitchFamily="50" charset="-127"/>
+              </a:rPr>
+              <a:t>구현</a:t>
+            </a:r>
+            <a:endParaRPr lang="ko-KR" altLang="en-US" dirty="0">
               <a:solidFill>
-                <a:srgbClr val="4C4C4C"/>
+                <a:srgbClr val="343434"/>
               </a:solidFill>
               <a:latin typeface="맑은 고딕" panose="020B0503020000020004" pitchFamily="50" charset="-127"/>
             </a:endParaRPr>
@@ -6433,10 +6424,10 @@
       </p:sp>
       <p:sp>
         <p:nvSpPr>
-          <p:cNvPr id="17" name="TextBox 16">
-            <a:extLst>
-              <a:ext uri="{FF2B5EF4-FFF2-40B4-BE49-F238E27FC236}">
-                <a16:creationId xmlns:a16="http://schemas.microsoft.com/office/drawing/2014/main" id="{D91A2F58-80E9-66A7-2ABA-137A5690A822}"/>
+          <p:cNvPr id="5" name="TextBox 4">
+            <a:extLst>
+              <a:ext uri="{FF2B5EF4-FFF2-40B4-BE49-F238E27FC236}">
+                <a16:creationId xmlns:a16="http://schemas.microsoft.com/office/drawing/2014/main" id="{36580D93-71EE-B491-9F8F-5FCCB98C6FFA}"/>
               </a:ext>
             </a:extLst>
           </p:cNvPr>
@@ -6445,8 +6436,8 @@
         </p:nvSpPr>
         <p:spPr>
           <a:xfrm>
-            <a:off x="1117600" y="4724400"/>
-            <a:ext cx="9906000" cy="276999"/>
+            <a:off x="812800" y="6350000"/>
+            <a:ext cx="4572000" cy="230832"/>
           </a:xfrm>
           <a:prstGeom prst="rect">
             <a:avLst/>
@@ -6460,129 +6451,27 @@
           <a:lstStyle/>
           <a:p>
             <a:r>
-              <a:rPr lang="ko-KR" altLang="en-US" sz="1200">
-                <a:solidFill>
-                  <a:srgbClr val="4C4C4C"/>
-                </a:solidFill>
-                <a:latin typeface="맑은 고딕" panose="020B0503020000020004" pitchFamily="50" charset="-127"/>
-              </a:rPr>
-              <a:t>프론트</a:t>
-            </a:r>
-            <a:r>
-              <a:rPr lang="en-US" altLang="ko-KR" sz="1200">
-                <a:solidFill>
-                  <a:srgbClr val="4C4C4C"/>
-                </a:solidFill>
-                <a:latin typeface="맑은 고딕" panose="020B0503020000020004" pitchFamily="50" charset="-127"/>
-              </a:rPr>
-              <a:t>: </a:t>
-            </a:r>
-            <a:r>
-              <a:rPr lang="ko-KR" altLang="en-US" sz="1200">
-                <a:solidFill>
-                  <a:srgbClr val="4C4C4C"/>
-                </a:solidFill>
-                <a:latin typeface="맑은 고딕" panose="020B0503020000020004" pitchFamily="50" charset="-127"/>
-              </a:rPr>
-              <a:t>화면 전환과 토큰 저장 </a:t>
-            </a:r>
-            <a:r>
-              <a:rPr lang="en-US" altLang="ko-KR" sz="1200">
-                <a:solidFill>
-                  <a:srgbClr val="4C4C4C"/>
-                </a:solidFill>
-                <a:latin typeface="맑은 고딕" panose="020B0503020000020004" pitchFamily="50" charset="-127"/>
-              </a:rPr>
-              <a:t>/ </a:t>
-            </a:r>
-            <a:r>
-              <a:rPr lang="ko-KR" altLang="en-US" sz="1200">
-                <a:solidFill>
-                  <a:srgbClr val="4C4C4C"/>
-                </a:solidFill>
-                <a:latin typeface="맑은 고딕" panose="020B0503020000020004" pitchFamily="50" charset="-127"/>
-              </a:rPr>
-              <a:t>백엔드</a:t>
-            </a:r>
-            <a:r>
-              <a:rPr lang="en-US" altLang="ko-KR" sz="1200">
-                <a:solidFill>
-                  <a:srgbClr val="4C4C4C"/>
-                </a:solidFill>
-                <a:latin typeface="맑은 고딕" panose="020B0503020000020004" pitchFamily="50" charset="-127"/>
-              </a:rPr>
-              <a:t>: </a:t>
-            </a:r>
-            <a:r>
-              <a:rPr lang="ko-KR" altLang="en-US" sz="1200">
-                <a:solidFill>
-                  <a:srgbClr val="4C4C4C"/>
-                </a:solidFill>
-                <a:latin typeface="맑은 고딕" panose="020B0503020000020004" pitchFamily="50" charset="-127"/>
-              </a:rPr>
-              <a:t>입력 검증</a:t>
-            </a:r>
-            <a:r>
-              <a:rPr lang="en-US" altLang="ko-KR" sz="1200">
-                <a:solidFill>
-                  <a:srgbClr val="4C4C4C"/>
-                </a:solidFill>
-                <a:latin typeface="맑은 고딕" panose="020B0503020000020004" pitchFamily="50" charset="-127"/>
-              </a:rPr>
-              <a:t>, </a:t>
-            </a:r>
-            <a:r>
-              <a:rPr lang="ko-KR" altLang="en-US" sz="1200">
-                <a:solidFill>
-                  <a:srgbClr val="4C4C4C"/>
-                </a:solidFill>
-                <a:latin typeface="맑은 고딕" panose="020B0503020000020004" pitchFamily="50" charset="-127"/>
-              </a:rPr>
-              <a:t>이메일 인증</a:t>
-            </a:r>
-            <a:r>
-              <a:rPr lang="en-US" altLang="ko-KR" sz="1200">
-                <a:solidFill>
-                  <a:srgbClr val="4C4C4C"/>
-                </a:solidFill>
-                <a:latin typeface="맑은 고딕" panose="020B0503020000020004" pitchFamily="50" charset="-127"/>
-              </a:rPr>
-              <a:t>, JWT </a:t>
-            </a:r>
-            <a:r>
-              <a:rPr lang="ko-KR" altLang="en-US" sz="1200">
-                <a:solidFill>
-                  <a:srgbClr val="4C4C4C"/>
-                </a:solidFill>
-                <a:latin typeface="맑은 고딕" panose="020B0503020000020004" pitchFamily="50" charset="-127"/>
-              </a:rPr>
-              <a:t>검증</a:t>
-            </a:r>
-            <a:r>
-              <a:rPr lang="en-US" altLang="ko-KR" sz="1200">
-                <a:solidFill>
-                  <a:srgbClr val="4C4C4C"/>
-                </a:solidFill>
-                <a:latin typeface="맑은 고딕" panose="020B0503020000020004" pitchFamily="50" charset="-127"/>
-              </a:rPr>
-              <a:t>, DB </a:t>
-            </a:r>
-            <a:r>
-              <a:rPr lang="ko-KR" altLang="en-US" sz="1200">
-                <a:solidFill>
-                  <a:srgbClr val="4C4C4C"/>
-                </a:solidFill>
-                <a:latin typeface="맑은 고딕" panose="020B0503020000020004" pitchFamily="50" charset="-127"/>
-              </a:rPr>
-              <a:t>처리</a:t>
-            </a:r>
+              <a:rPr lang="en-US" altLang="ko-KR" sz="900">
+                <a:solidFill>
+                  <a:srgbClr val="686472"/>
+                </a:solidFill>
+                <a:latin typeface="Arial" panose="020B0604020202020204" pitchFamily="34" charset="0"/>
+              </a:rPr>
+              <a:t>Career Mission AI · 7/9</a:t>
+            </a:r>
+            <a:endParaRPr lang="ko-KR" altLang="en-US" sz="900" dirty="0">
+              <a:solidFill>
+                <a:srgbClr val="686472"/>
+              </a:solidFill>
+              <a:latin typeface="Arial" panose="020B0604020202020204" pitchFamily="34" charset="0"/>
+            </a:endParaRPr>
           </a:p>
         </p:txBody>
       </p:sp>
     </p:spTree>
     <p:extLst>
       <p:ext uri="{BB962C8B-B14F-4D97-AF65-F5344CB8AC3E}">
-        <p14:creationId xmlns:p14="http://schemas.microsoft.com/office/powerpoint/2010/main" val="2308402675"/>
+        <p14:creationId xmlns:p14="http://schemas.microsoft.com/office/powerpoint/2010/main" val="802809471"/>
       </p:ext>
     </p:extLst>
   </p:cSld>
@@ -6622,6 +6511,1109 @@
           <p:cNvPr id="2" name="TextBox 1">
             <a:extLst>
               <a:ext uri="{FF2B5EF4-FFF2-40B4-BE49-F238E27FC236}">
+                <a16:creationId xmlns:a16="http://schemas.microsoft.com/office/drawing/2014/main" id="{FAE48F1C-97A4-F68D-ECEA-1AE3F17FE347}"/>
+              </a:ext>
+            </a:extLst>
+          </p:cNvPr>
+          <p:cNvSpPr txBox="1"/>
+          <p:nvPr/>
+        </p:nvSpPr>
+        <p:spPr>
+          <a:xfrm>
+            <a:off x="609600" y="406400"/>
+            <a:ext cx="10922000" cy="523220"/>
+          </a:xfrm>
+          <a:prstGeom prst="rect">
+            <a:avLst/>
+          </a:prstGeom>
+          <a:noFill/>
+        </p:spPr>
+        <p:txBody>
+          <a:bodyPr vert="horz" rtlCol="0">
+            <a:spAutoFit/>
+          </a:bodyPr>
+          <a:lstStyle/>
+          <a:p>
+            <a:r>
+              <a:rPr lang="ko-KR" altLang="en-US" sz="2800" b="1">
+                <a:solidFill>
+                  <a:srgbClr val="0F1716"/>
+                </a:solidFill>
+                <a:latin typeface="맑은 고딕" panose="020B0503020000020004" pitchFamily="50" charset="-127"/>
+              </a:rPr>
+              <a:t>인증 흐름도</a:t>
+            </a:r>
+          </a:p>
+        </p:txBody>
+      </p:sp>
+      <p:sp>
+        <p:nvSpPr>
+          <p:cNvPr id="3" name="사각형: 둥근 모서리 2">
+            <a:extLst>
+              <a:ext uri="{FF2B5EF4-FFF2-40B4-BE49-F238E27FC236}">
+                <a16:creationId xmlns:a16="http://schemas.microsoft.com/office/drawing/2014/main" id="{7EF33B35-035D-A394-50B6-5BB65BA483F6}"/>
+              </a:ext>
+            </a:extLst>
+          </p:cNvPr>
+          <p:cNvSpPr/>
+          <p:nvPr/>
+        </p:nvSpPr>
+        <p:spPr>
+          <a:xfrm>
+            <a:off x="571500" y="2349500"/>
+            <a:ext cx="1333500" cy="889000"/>
+          </a:xfrm>
+          <a:prstGeom prst="roundRect">
+            <a:avLst/>
+          </a:prstGeom>
+          <a:solidFill>
+            <a:srgbClr val="FFFFFF"/>
+          </a:solidFill>
+          <a:ln>
+            <a:solidFill>
+              <a:srgbClr val="E0E0E0"/>
+            </a:solidFill>
+          </a:ln>
+        </p:spPr>
+        <p:style>
+          <a:lnRef idx="2">
+            <a:schemeClr val="accent1">
+              <a:shade val="15000"/>
+            </a:schemeClr>
+          </a:lnRef>
+          <a:fillRef idx="1">
+            <a:schemeClr val="accent1"/>
+          </a:fillRef>
+          <a:effectRef idx="0">
+            <a:schemeClr val="accent1"/>
+          </a:effectRef>
+          <a:fontRef idx="minor">
+            <a:schemeClr val="lt1"/>
+          </a:fontRef>
+        </p:style>
+        <p:txBody>
+          <a:bodyPr rtlCol="0" anchor="ctr" anchorCtr="1"/>
+          <a:lstStyle/>
+          <a:p>
+            <a:pPr algn="ctr"/>
+            <a:r>
+              <a:rPr lang="ko-KR" altLang="en-US" sz="1400" b="1">
+                <a:solidFill>
+                  <a:srgbClr val="0F1716"/>
+                </a:solidFill>
+                <a:latin typeface="맑은 고딕" panose="020B0503020000020004" pitchFamily="50" charset="-127"/>
+              </a:rPr>
+              <a:t>회원가입 입력</a:t>
+            </a:r>
+          </a:p>
+        </p:txBody>
+      </p:sp>
+      <p:cxnSp>
+        <p:nvCxnSpPr>
+          <p:cNvPr id="4" name="직선 화살표 연결선 3">
+            <a:extLst>
+              <a:ext uri="{FF2B5EF4-FFF2-40B4-BE49-F238E27FC236}">
+                <a16:creationId xmlns:a16="http://schemas.microsoft.com/office/drawing/2014/main" id="{317B4170-C362-9649-4D7F-5900E174E367}"/>
+              </a:ext>
+            </a:extLst>
+          </p:cNvPr>
+          <p:cNvCxnSpPr/>
+          <p:nvPr/>
+        </p:nvCxnSpPr>
+        <p:spPr>
+          <a:xfrm>
+            <a:off x="1905000" y="2794000"/>
+            <a:ext cx="317500" cy="0"/>
+          </a:xfrm>
+          <a:prstGeom prst="straightConnector1">
+            <a:avLst/>
+          </a:prstGeom>
+          <a:ln w="27940">
+            <a:solidFill>
+              <a:srgbClr val="228317"/>
+            </a:solidFill>
+            <a:tailEnd type="arrow"/>
+          </a:ln>
+        </p:spPr>
+        <p:style>
+          <a:lnRef idx="1">
+            <a:schemeClr val="accent1"/>
+          </a:lnRef>
+          <a:fillRef idx="0">
+            <a:schemeClr val="accent1"/>
+          </a:fillRef>
+          <a:effectRef idx="0">
+            <a:schemeClr val="accent1"/>
+          </a:effectRef>
+          <a:fontRef idx="minor">
+            <a:schemeClr val="tx1"/>
+          </a:fontRef>
+        </p:style>
+      </p:cxnSp>
+      <p:sp>
+        <p:nvSpPr>
+          <p:cNvPr id="5" name="사각형: 둥근 모서리 4">
+            <a:extLst>
+              <a:ext uri="{FF2B5EF4-FFF2-40B4-BE49-F238E27FC236}">
+                <a16:creationId xmlns:a16="http://schemas.microsoft.com/office/drawing/2014/main" id="{88E88C1A-20AE-CCF7-0897-C678AA395845}"/>
+              </a:ext>
+            </a:extLst>
+          </p:cNvPr>
+          <p:cNvSpPr/>
+          <p:nvPr/>
+        </p:nvSpPr>
+        <p:spPr>
+          <a:xfrm>
+            <a:off x="2222500" y="2349500"/>
+            <a:ext cx="1333500" cy="889000"/>
+          </a:xfrm>
+          <a:prstGeom prst="roundRect">
+            <a:avLst/>
+          </a:prstGeom>
+          <a:solidFill>
+            <a:srgbClr val="FFFFFF"/>
+          </a:solidFill>
+          <a:ln>
+            <a:solidFill>
+              <a:srgbClr val="E0E0E0"/>
+            </a:solidFill>
+          </a:ln>
+        </p:spPr>
+        <p:style>
+          <a:lnRef idx="2">
+            <a:schemeClr val="accent1">
+              <a:shade val="15000"/>
+            </a:schemeClr>
+          </a:lnRef>
+          <a:fillRef idx="1">
+            <a:schemeClr val="accent1"/>
+          </a:fillRef>
+          <a:effectRef idx="0">
+            <a:schemeClr val="accent1"/>
+          </a:effectRef>
+          <a:fontRef idx="minor">
+            <a:schemeClr val="lt1"/>
+          </a:fontRef>
+        </p:style>
+        <p:txBody>
+          <a:bodyPr rtlCol="0" anchor="ctr" anchorCtr="1"/>
+          <a:lstStyle/>
+          <a:p>
+            <a:pPr algn="ctr"/>
+            <a:r>
+              <a:rPr lang="en-US" altLang="ko-KR" sz="1400" b="1">
+                <a:solidFill>
+                  <a:srgbClr val="0F1716"/>
+                </a:solidFill>
+                <a:latin typeface="맑은 고딕" panose="020B0503020000020004" pitchFamily="50" charset="-127"/>
+              </a:rPr>
+              <a:t>DB </a:t>
+            </a:r>
+            <a:r>
+              <a:rPr lang="ko-KR" altLang="en-US" sz="1400" b="1">
+                <a:solidFill>
+                  <a:srgbClr val="0F1716"/>
+                </a:solidFill>
+                <a:latin typeface="맑은 고딕" panose="020B0503020000020004" pitchFamily="50" charset="-127"/>
+              </a:rPr>
+              <a:t>저장</a:t>
+            </a:r>
+          </a:p>
+        </p:txBody>
+      </p:sp>
+      <p:cxnSp>
+        <p:nvCxnSpPr>
+          <p:cNvPr id="6" name="직선 화살표 연결선 5">
+            <a:extLst>
+              <a:ext uri="{FF2B5EF4-FFF2-40B4-BE49-F238E27FC236}">
+                <a16:creationId xmlns:a16="http://schemas.microsoft.com/office/drawing/2014/main" id="{BCC47DC6-A868-FFD5-C8F4-6D33D0107815}"/>
+              </a:ext>
+            </a:extLst>
+          </p:cNvPr>
+          <p:cNvCxnSpPr/>
+          <p:nvPr/>
+        </p:nvCxnSpPr>
+        <p:spPr>
+          <a:xfrm>
+            <a:off x="3556000" y="2794000"/>
+            <a:ext cx="317500" cy="0"/>
+          </a:xfrm>
+          <a:prstGeom prst="straightConnector1">
+            <a:avLst/>
+          </a:prstGeom>
+          <a:ln w="27940">
+            <a:solidFill>
+              <a:srgbClr val="228317"/>
+            </a:solidFill>
+            <a:tailEnd type="arrow"/>
+          </a:ln>
+        </p:spPr>
+        <p:style>
+          <a:lnRef idx="1">
+            <a:schemeClr val="accent1"/>
+          </a:lnRef>
+          <a:fillRef idx="0">
+            <a:schemeClr val="accent1"/>
+          </a:fillRef>
+          <a:effectRef idx="0">
+            <a:schemeClr val="accent1"/>
+          </a:effectRef>
+          <a:fontRef idx="minor">
+            <a:schemeClr val="tx1"/>
+          </a:fontRef>
+        </p:style>
+      </p:cxnSp>
+      <p:sp>
+        <p:nvSpPr>
+          <p:cNvPr id="7" name="사각형: 둥근 모서리 6">
+            <a:extLst>
+              <a:ext uri="{FF2B5EF4-FFF2-40B4-BE49-F238E27FC236}">
+                <a16:creationId xmlns:a16="http://schemas.microsoft.com/office/drawing/2014/main" id="{FA8BD842-48DE-C655-355D-DC908ACC7914}"/>
+              </a:ext>
+            </a:extLst>
+          </p:cNvPr>
+          <p:cNvSpPr/>
+          <p:nvPr/>
+        </p:nvSpPr>
+        <p:spPr>
+          <a:xfrm>
+            <a:off x="3873500" y="2349500"/>
+            <a:ext cx="1333500" cy="889000"/>
+          </a:xfrm>
+          <a:prstGeom prst="roundRect">
+            <a:avLst/>
+          </a:prstGeom>
+          <a:solidFill>
+            <a:srgbClr val="FFFFFF"/>
+          </a:solidFill>
+          <a:ln>
+            <a:solidFill>
+              <a:srgbClr val="E0E0E0"/>
+            </a:solidFill>
+          </a:ln>
+        </p:spPr>
+        <p:style>
+          <a:lnRef idx="2">
+            <a:schemeClr val="accent1">
+              <a:shade val="15000"/>
+            </a:schemeClr>
+          </a:lnRef>
+          <a:fillRef idx="1">
+            <a:schemeClr val="accent1"/>
+          </a:fillRef>
+          <a:effectRef idx="0">
+            <a:schemeClr val="accent1"/>
+          </a:effectRef>
+          <a:fontRef idx="minor">
+            <a:schemeClr val="lt1"/>
+          </a:fontRef>
+        </p:style>
+        <p:txBody>
+          <a:bodyPr rtlCol="0" anchor="ctr" anchorCtr="1"/>
+          <a:lstStyle/>
+          <a:p>
+            <a:pPr algn="ctr"/>
+            <a:r>
+              <a:rPr lang="ko-KR" altLang="en-US" sz="1400" b="1">
+                <a:solidFill>
+                  <a:srgbClr val="0F1716"/>
+                </a:solidFill>
+                <a:latin typeface="맑은 고딕" panose="020B0503020000020004" pitchFamily="50" charset="-127"/>
+              </a:rPr>
+              <a:t>인증 메일 발송</a:t>
+            </a:r>
+          </a:p>
+        </p:txBody>
+      </p:sp>
+      <p:cxnSp>
+        <p:nvCxnSpPr>
+          <p:cNvPr id="8" name="직선 화살표 연결선 7">
+            <a:extLst>
+              <a:ext uri="{FF2B5EF4-FFF2-40B4-BE49-F238E27FC236}">
+                <a16:creationId xmlns:a16="http://schemas.microsoft.com/office/drawing/2014/main" id="{71553CF1-DD1C-AFE3-8DD4-7513D2457E37}"/>
+              </a:ext>
+            </a:extLst>
+          </p:cNvPr>
+          <p:cNvCxnSpPr/>
+          <p:nvPr/>
+        </p:nvCxnSpPr>
+        <p:spPr>
+          <a:xfrm>
+            <a:off x="5207000" y="2794000"/>
+            <a:ext cx="317500" cy="0"/>
+          </a:xfrm>
+          <a:prstGeom prst="straightConnector1">
+            <a:avLst/>
+          </a:prstGeom>
+          <a:ln w="27940">
+            <a:solidFill>
+              <a:srgbClr val="228317"/>
+            </a:solidFill>
+            <a:tailEnd type="arrow"/>
+          </a:ln>
+        </p:spPr>
+        <p:style>
+          <a:lnRef idx="1">
+            <a:schemeClr val="accent1"/>
+          </a:lnRef>
+          <a:fillRef idx="0">
+            <a:schemeClr val="accent1"/>
+          </a:fillRef>
+          <a:effectRef idx="0">
+            <a:schemeClr val="accent1"/>
+          </a:effectRef>
+          <a:fontRef idx="minor">
+            <a:schemeClr val="tx1"/>
+          </a:fontRef>
+        </p:style>
+      </p:cxnSp>
+      <p:sp>
+        <p:nvSpPr>
+          <p:cNvPr id="9" name="사각형: 둥근 모서리 8">
+            <a:extLst>
+              <a:ext uri="{FF2B5EF4-FFF2-40B4-BE49-F238E27FC236}">
+                <a16:creationId xmlns:a16="http://schemas.microsoft.com/office/drawing/2014/main" id="{FA0D759B-72C9-2BB7-D2C2-DEAD1408A5F2}"/>
+              </a:ext>
+            </a:extLst>
+          </p:cNvPr>
+          <p:cNvSpPr/>
+          <p:nvPr/>
+        </p:nvSpPr>
+        <p:spPr>
+          <a:xfrm>
+            <a:off x="5524500" y="2349500"/>
+            <a:ext cx="1333500" cy="889000"/>
+          </a:xfrm>
+          <a:prstGeom prst="roundRect">
+            <a:avLst/>
+          </a:prstGeom>
+          <a:solidFill>
+            <a:srgbClr val="FFFFFF"/>
+          </a:solidFill>
+          <a:ln>
+            <a:solidFill>
+              <a:srgbClr val="E0E0E0"/>
+            </a:solidFill>
+          </a:ln>
+        </p:spPr>
+        <p:style>
+          <a:lnRef idx="2">
+            <a:schemeClr val="accent1">
+              <a:shade val="15000"/>
+            </a:schemeClr>
+          </a:lnRef>
+          <a:fillRef idx="1">
+            <a:schemeClr val="accent1"/>
+          </a:fillRef>
+          <a:effectRef idx="0">
+            <a:schemeClr val="accent1"/>
+          </a:effectRef>
+          <a:fontRef idx="minor">
+            <a:schemeClr val="lt1"/>
+          </a:fontRef>
+        </p:style>
+        <p:txBody>
+          <a:bodyPr rtlCol="0" anchor="ctr" anchorCtr="1"/>
+          <a:lstStyle/>
+          <a:p>
+            <a:pPr algn="ctr"/>
+            <a:r>
+              <a:rPr lang="ko-KR" altLang="en-US" sz="1400" b="1">
+                <a:solidFill>
+                  <a:srgbClr val="0F1716"/>
+                </a:solidFill>
+                <a:latin typeface="맑은 고딕" panose="020B0503020000020004" pitchFamily="50" charset="-127"/>
+              </a:rPr>
+              <a:t>이메일 인증</a:t>
+            </a:r>
+          </a:p>
+        </p:txBody>
+      </p:sp>
+      <p:cxnSp>
+        <p:nvCxnSpPr>
+          <p:cNvPr id="10" name="직선 화살표 연결선 9">
+            <a:extLst>
+              <a:ext uri="{FF2B5EF4-FFF2-40B4-BE49-F238E27FC236}">
+                <a16:creationId xmlns:a16="http://schemas.microsoft.com/office/drawing/2014/main" id="{AC4F6919-8E1A-ED4D-95D0-81566ABBF8E4}"/>
+              </a:ext>
+            </a:extLst>
+          </p:cNvPr>
+          <p:cNvCxnSpPr/>
+          <p:nvPr/>
+        </p:nvCxnSpPr>
+        <p:spPr>
+          <a:xfrm>
+            <a:off x="6858000" y="2794000"/>
+            <a:ext cx="317500" cy="0"/>
+          </a:xfrm>
+          <a:prstGeom prst="straightConnector1">
+            <a:avLst/>
+          </a:prstGeom>
+          <a:ln w="27940">
+            <a:solidFill>
+              <a:srgbClr val="228317"/>
+            </a:solidFill>
+            <a:tailEnd type="arrow"/>
+          </a:ln>
+        </p:spPr>
+        <p:style>
+          <a:lnRef idx="1">
+            <a:schemeClr val="accent1"/>
+          </a:lnRef>
+          <a:fillRef idx="0">
+            <a:schemeClr val="accent1"/>
+          </a:fillRef>
+          <a:effectRef idx="0">
+            <a:schemeClr val="accent1"/>
+          </a:effectRef>
+          <a:fontRef idx="minor">
+            <a:schemeClr val="tx1"/>
+          </a:fontRef>
+        </p:style>
+      </p:cxnSp>
+      <p:sp>
+        <p:nvSpPr>
+          <p:cNvPr id="11" name="사각형: 둥근 모서리 10">
+            <a:extLst>
+              <a:ext uri="{FF2B5EF4-FFF2-40B4-BE49-F238E27FC236}">
+                <a16:creationId xmlns:a16="http://schemas.microsoft.com/office/drawing/2014/main" id="{F9E654B9-272D-E12D-5BEF-39558E106AE0}"/>
+              </a:ext>
+            </a:extLst>
+          </p:cNvPr>
+          <p:cNvSpPr/>
+          <p:nvPr/>
+        </p:nvSpPr>
+        <p:spPr>
+          <a:xfrm>
+            <a:off x="7175500" y="2349500"/>
+            <a:ext cx="1333500" cy="889000"/>
+          </a:xfrm>
+          <a:prstGeom prst="roundRect">
+            <a:avLst/>
+          </a:prstGeom>
+          <a:solidFill>
+            <a:srgbClr val="FFFFFF"/>
+          </a:solidFill>
+          <a:ln>
+            <a:solidFill>
+              <a:srgbClr val="E0E0E0"/>
+            </a:solidFill>
+          </a:ln>
+        </p:spPr>
+        <p:style>
+          <a:lnRef idx="2">
+            <a:schemeClr val="accent1">
+              <a:shade val="15000"/>
+            </a:schemeClr>
+          </a:lnRef>
+          <a:fillRef idx="1">
+            <a:schemeClr val="accent1"/>
+          </a:fillRef>
+          <a:effectRef idx="0">
+            <a:schemeClr val="accent1"/>
+          </a:effectRef>
+          <a:fontRef idx="minor">
+            <a:schemeClr val="lt1"/>
+          </a:fontRef>
+        </p:style>
+        <p:txBody>
+          <a:bodyPr rtlCol="0" anchor="ctr" anchorCtr="1"/>
+          <a:lstStyle/>
+          <a:p>
+            <a:pPr algn="ctr"/>
+            <a:r>
+              <a:rPr lang="ko-KR" altLang="en-US" sz="1400" b="1">
+                <a:solidFill>
+                  <a:srgbClr val="0F1716"/>
+                </a:solidFill>
+                <a:latin typeface="맑은 고딕" panose="020B0503020000020004" pitchFamily="50" charset="-127"/>
+              </a:rPr>
+              <a:t>로그인</a:t>
+            </a:r>
+          </a:p>
+        </p:txBody>
+      </p:sp>
+      <p:cxnSp>
+        <p:nvCxnSpPr>
+          <p:cNvPr id="12" name="직선 화살표 연결선 11">
+            <a:extLst>
+              <a:ext uri="{FF2B5EF4-FFF2-40B4-BE49-F238E27FC236}">
+                <a16:creationId xmlns:a16="http://schemas.microsoft.com/office/drawing/2014/main" id="{D923C259-0FC2-EF4B-3B9E-3E28E6E6D87B}"/>
+              </a:ext>
+            </a:extLst>
+          </p:cNvPr>
+          <p:cNvCxnSpPr/>
+          <p:nvPr/>
+        </p:nvCxnSpPr>
+        <p:spPr>
+          <a:xfrm>
+            <a:off x="8509000" y="2794000"/>
+            <a:ext cx="317500" cy="0"/>
+          </a:xfrm>
+          <a:prstGeom prst="straightConnector1">
+            <a:avLst/>
+          </a:prstGeom>
+          <a:ln w="27940">
+            <a:solidFill>
+              <a:srgbClr val="228317"/>
+            </a:solidFill>
+            <a:tailEnd type="arrow"/>
+          </a:ln>
+        </p:spPr>
+        <p:style>
+          <a:lnRef idx="1">
+            <a:schemeClr val="accent1"/>
+          </a:lnRef>
+          <a:fillRef idx="0">
+            <a:schemeClr val="accent1"/>
+          </a:fillRef>
+          <a:effectRef idx="0">
+            <a:schemeClr val="accent1"/>
+          </a:effectRef>
+          <a:fontRef idx="minor">
+            <a:schemeClr val="tx1"/>
+          </a:fontRef>
+        </p:style>
+      </p:cxnSp>
+      <p:sp>
+        <p:nvSpPr>
+          <p:cNvPr id="13" name="사각형: 둥근 모서리 12">
+            <a:extLst>
+              <a:ext uri="{FF2B5EF4-FFF2-40B4-BE49-F238E27FC236}">
+                <a16:creationId xmlns:a16="http://schemas.microsoft.com/office/drawing/2014/main" id="{0645B250-5398-D5F2-FDBB-439B8D8C13D8}"/>
+              </a:ext>
+            </a:extLst>
+          </p:cNvPr>
+          <p:cNvSpPr/>
+          <p:nvPr/>
+        </p:nvSpPr>
+        <p:spPr>
+          <a:xfrm>
+            <a:off x="8826500" y="2349500"/>
+            <a:ext cx="1333500" cy="889000"/>
+          </a:xfrm>
+          <a:prstGeom prst="roundRect">
+            <a:avLst/>
+          </a:prstGeom>
+          <a:solidFill>
+            <a:srgbClr val="FFFFFF"/>
+          </a:solidFill>
+          <a:ln>
+            <a:solidFill>
+              <a:srgbClr val="E0E0E0"/>
+            </a:solidFill>
+          </a:ln>
+        </p:spPr>
+        <p:style>
+          <a:lnRef idx="2">
+            <a:schemeClr val="accent1">
+              <a:shade val="15000"/>
+            </a:schemeClr>
+          </a:lnRef>
+          <a:fillRef idx="1">
+            <a:schemeClr val="accent1"/>
+          </a:fillRef>
+          <a:effectRef idx="0">
+            <a:schemeClr val="accent1"/>
+          </a:effectRef>
+          <a:fontRef idx="minor">
+            <a:schemeClr val="lt1"/>
+          </a:fontRef>
+        </p:style>
+        <p:txBody>
+          <a:bodyPr rtlCol="0" anchor="ctr" anchorCtr="1"/>
+          <a:lstStyle/>
+          <a:p>
+            <a:pPr algn="ctr"/>
+            <a:r>
+              <a:rPr lang="en-US" altLang="ko-KR" sz="1400" b="1">
+                <a:solidFill>
+                  <a:srgbClr val="0F1716"/>
+                </a:solidFill>
+                <a:latin typeface="맑은 고딕" panose="020B0503020000020004" pitchFamily="50" charset="-127"/>
+              </a:rPr>
+              <a:t>JWT </a:t>
+            </a:r>
+            <a:r>
+              <a:rPr lang="ko-KR" altLang="en-US" sz="1400" b="1">
+                <a:solidFill>
+                  <a:srgbClr val="0F1716"/>
+                </a:solidFill>
+                <a:latin typeface="맑은 고딕" panose="020B0503020000020004" pitchFamily="50" charset="-127"/>
+              </a:rPr>
+              <a:t>발급</a:t>
+            </a:r>
+          </a:p>
+        </p:txBody>
+      </p:sp>
+      <p:cxnSp>
+        <p:nvCxnSpPr>
+          <p:cNvPr id="14" name="직선 화살표 연결선 13">
+            <a:extLst>
+              <a:ext uri="{FF2B5EF4-FFF2-40B4-BE49-F238E27FC236}">
+                <a16:creationId xmlns:a16="http://schemas.microsoft.com/office/drawing/2014/main" id="{95462BF2-8590-1029-F61C-3FA8AF961D1F}"/>
+              </a:ext>
+            </a:extLst>
+          </p:cNvPr>
+          <p:cNvCxnSpPr/>
+          <p:nvPr/>
+        </p:nvCxnSpPr>
+        <p:spPr>
+          <a:xfrm>
+            <a:off x="10160000" y="2794000"/>
+            <a:ext cx="317500" cy="0"/>
+          </a:xfrm>
+          <a:prstGeom prst="straightConnector1">
+            <a:avLst/>
+          </a:prstGeom>
+          <a:ln w="27940">
+            <a:solidFill>
+              <a:srgbClr val="228317"/>
+            </a:solidFill>
+            <a:tailEnd type="arrow"/>
+          </a:ln>
+        </p:spPr>
+        <p:style>
+          <a:lnRef idx="1">
+            <a:schemeClr val="accent1"/>
+          </a:lnRef>
+          <a:fillRef idx="0">
+            <a:schemeClr val="accent1"/>
+          </a:fillRef>
+          <a:effectRef idx="0">
+            <a:schemeClr val="accent1"/>
+          </a:effectRef>
+          <a:fontRef idx="minor">
+            <a:schemeClr val="tx1"/>
+          </a:fontRef>
+        </p:style>
+      </p:cxnSp>
+      <p:sp>
+        <p:nvSpPr>
+          <p:cNvPr id="15" name="사각형: 둥근 모서리 14">
+            <a:extLst>
+              <a:ext uri="{FF2B5EF4-FFF2-40B4-BE49-F238E27FC236}">
+                <a16:creationId xmlns:a16="http://schemas.microsoft.com/office/drawing/2014/main" id="{84296210-0938-3E55-B273-5F3BDE19EEA6}"/>
+              </a:ext>
+            </a:extLst>
+          </p:cNvPr>
+          <p:cNvSpPr/>
+          <p:nvPr/>
+        </p:nvSpPr>
+        <p:spPr>
+          <a:xfrm>
+            <a:off x="10477500" y="2349500"/>
+            <a:ext cx="1333500" cy="889000"/>
+          </a:xfrm>
+          <a:prstGeom prst="roundRect">
+            <a:avLst/>
+          </a:prstGeom>
+          <a:solidFill>
+            <a:srgbClr val="FFFFFF"/>
+          </a:solidFill>
+          <a:ln>
+            <a:solidFill>
+              <a:srgbClr val="E0E0E0"/>
+            </a:solidFill>
+          </a:ln>
+        </p:spPr>
+        <p:style>
+          <a:lnRef idx="2">
+            <a:schemeClr val="accent1">
+              <a:shade val="15000"/>
+            </a:schemeClr>
+          </a:lnRef>
+          <a:fillRef idx="1">
+            <a:schemeClr val="accent1"/>
+          </a:fillRef>
+          <a:effectRef idx="0">
+            <a:schemeClr val="accent1"/>
+          </a:effectRef>
+          <a:fontRef idx="minor">
+            <a:schemeClr val="lt1"/>
+          </a:fontRef>
+        </p:style>
+        <p:txBody>
+          <a:bodyPr rtlCol="0" anchor="ctr" anchorCtr="1"/>
+          <a:lstStyle/>
+          <a:p>
+            <a:pPr algn="ctr"/>
+            <a:r>
+              <a:rPr lang="ko-KR" altLang="en-US" sz="1400" b="1">
+                <a:solidFill>
+                  <a:srgbClr val="0F1716"/>
+                </a:solidFill>
+                <a:latin typeface="맑은 고딕" panose="020B0503020000020004" pitchFamily="50" charset="-127"/>
+              </a:rPr>
+              <a:t>보호 페이지 접근</a:t>
+            </a:r>
+          </a:p>
+        </p:txBody>
+      </p:sp>
+      <p:sp>
+        <p:nvSpPr>
+          <p:cNvPr id="16" name="TextBox 15">
+            <a:extLst>
+              <a:ext uri="{FF2B5EF4-FFF2-40B4-BE49-F238E27FC236}">
+                <a16:creationId xmlns:a16="http://schemas.microsoft.com/office/drawing/2014/main" id="{FB857C14-AB50-77E5-5A89-2DA075491007}"/>
+              </a:ext>
+            </a:extLst>
+          </p:cNvPr>
+          <p:cNvSpPr txBox="1"/>
+          <p:nvPr/>
+        </p:nvSpPr>
+        <p:spPr>
+          <a:xfrm>
+            <a:off x="1117600" y="4064000"/>
+            <a:ext cx="9906000" cy="276999"/>
+          </a:xfrm>
+          <a:prstGeom prst="rect">
+            <a:avLst/>
+          </a:prstGeom>
+          <a:noFill/>
+        </p:spPr>
+        <p:txBody>
+          <a:bodyPr vert="horz" rtlCol="0">
+            <a:spAutoFit/>
+          </a:bodyPr>
+          <a:lstStyle/>
+          <a:p>
+            <a:r>
+              <a:rPr lang="ko-KR" altLang="en-US" sz="1200">
+                <a:solidFill>
+                  <a:srgbClr val="4C4C4C"/>
+                </a:solidFill>
+                <a:latin typeface="맑은 고딕" panose="020B0503020000020004" pitchFamily="50" charset="-127"/>
+              </a:rPr>
+              <a:t>핵심</a:t>
+            </a:r>
+            <a:r>
+              <a:rPr lang="en-US" altLang="ko-KR" sz="1200">
+                <a:solidFill>
+                  <a:srgbClr val="4C4C4C"/>
+                </a:solidFill>
+                <a:latin typeface="맑은 고딕" panose="020B0503020000020004" pitchFamily="50" charset="-127"/>
+              </a:rPr>
+              <a:t>: </a:t>
+            </a:r>
+            <a:r>
+              <a:rPr lang="ko-KR" altLang="en-US" sz="1200">
+                <a:solidFill>
+                  <a:srgbClr val="4C4C4C"/>
+                </a:solidFill>
+                <a:latin typeface="맑은 고딕" panose="020B0503020000020004" pitchFamily="50" charset="-127"/>
+              </a:rPr>
+              <a:t>인증 전 사용자는 로그인할 수 없고</a:t>
+            </a:r>
+            <a:r>
+              <a:rPr lang="en-US" altLang="ko-KR" sz="1200">
+                <a:solidFill>
+                  <a:srgbClr val="4C4C4C"/>
+                </a:solidFill>
+                <a:latin typeface="맑은 고딕" panose="020B0503020000020004" pitchFamily="50" charset="-127"/>
+              </a:rPr>
+              <a:t>, </a:t>
+            </a:r>
+            <a:r>
+              <a:rPr lang="ko-KR" altLang="en-US" sz="1200">
+                <a:solidFill>
+                  <a:srgbClr val="4C4C4C"/>
+                </a:solidFill>
+                <a:latin typeface="맑은 고딕" panose="020B0503020000020004" pitchFamily="50" charset="-127"/>
+              </a:rPr>
+              <a:t>로그인 후 받은 </a:t>
+            </a:r>
+            <a:r>
+              <a:rPr lang="en-US" altLang="ko-KR" sz="1200">
+                <a:solidFill>
+                  <a:srgbClr val="4C4C4C"/>
+                </a:solidFill>
+                <a:latin typeface="맑은 고딕" panose="020B0503020000020004" pitchFamily="50" charset="-127"/>
+              </a:rPr>
+              <a:t>JWT</a:t>
+            </a:r>
+            <a:r>
+              <a:rPr lang="ko-KR" altLang="en-US" sz="1200">
+                <a:solidFill>
+                  <a:srgbClr val="4C4C4C"/>
+                </a:solidFill>
+                <a:latin typeface="맑은 고딕" panose="020B0503020000020004" pitchFamily="50" charset="-127"/>
+              </a:rPr>
+              <a:t>로 보호 페이지와 보호 </a:t>
+            </a:r>
+            <a:r>
+              <a:rPr lang="en-US" altLang="ko-KR" sz="1200">
+                <a:solidFill>
+                  <a:srgbClr val="4C4C4C"/>
+                </a:solidFill>
+                <a:latin typeface="맑은 고딕" panose="020B0503020000020004" pitchFamily="50" charset="-127"/>
+              </a:rPr>
+              <a:t>API</a:t>
+            </a:r>
+            <a:r>
+              <a:rPr lang="ko-KR" altLang="en-US" sz="1200">
+                <a:solidFill>
+                  <a:srgbClr val="4C4C4C"/>
+                </a:solidFill>
+                <a:latin typeface="맑은 고딕" panose="020B0503020000020004" pitchFamily="50" charset="-127"/>
+              </a:rPr>
+              <a:t>에 접근합니다</a:t>
+            </a:r>
+            <a:r>
+              <a:rPr lang="en-US" altLang="ko-KR" sz="1200">
+                <a:solidFill>
+                  <a:srgbClr val="4C4C4C"/>
+                </a:solidFill>
+                <a:latin typeface="맑은 고딕" panose="020B0503020000020004" pitchFamily="50" charset="-127"/>
+              </a:rPr>
+              <a:t>.</a:t>
+            </a:r>
+            <a:endParaRPr lang="ko-KR" altLang="en-US" sz="1200">
+              <a:solidFill>
+                <a:srgbClr val="4C4C4C"/>
+              </a:solidFill>
+              <a:latin typeface="맑은 고딕" panose="020B0503020000020004" pitchFamily="50" charset="-127"/>
+            </a:endParaRPr>
+          </a:p>
+        </p:txBody>
+      </p:sp>
+      <p:sp>
+        <p:nvSpPr>
+          <p:cNvPr id="17" name="TextBox 16">
+            <a:extLst>
+              <a:ext uri="{FF2B5EF4-FFF2-40B4-BE49-F238E27FC236}">
+                <a16:creationId xmlns:a16="http://schemas.microsoft.com/office/drawing/2014/main" id="{D91A2F58-80E9-66A7-2ABA-137A5690A822}"/>
+              </a:ext>
+            </a:extLst>
+          </p:cNvPr>
+          <p:cNvSpPr txBox="1"/>
+          <p:nvPr/>
+        </p:nvSpPr>
+        <p:spPr>
+          <a:xfrm>
+            <a:off x="1117600" y="4724400"/>
+            <a:ext cx="9906000" cy="276999"/>
+          </a:xfrm>
+          <a:prstGeom prst="rect">
+            <a:avLst/>
+          </a:prstGeom>
+          <a:noFill/>
+        </p:spPr>
+        <p:txBody>
+          <a:bodyPr vert="horz" rtlCol="0">
+            <a:spAutoFit/>
+          </a:bodyPr>
+          <a:lstStyle/>
+          <a:p>
+            <a:r>
+              <a:rPr lang="ko-KR" altLang="en-US" sz="1200">
+                <a:solidFill>
+                  <a:srgbClr val="4C4C4C"/>
+                </a:solidFill>
+                <a:latin typeface="맑은 고딕" panose="020B0503020000020004" pitchFamily="50" charset="-127"/>
+              </a:rPr>
+              <a:t>프론트</a:t>
+            </a:r>
+            <a:r>
+              <a:rPr lang="en-US" altLang="ko-KR" sz="1200">
+                <a:solidFill>
+                  <a:srgbClr val="4C4C4C"/>
+                </a:solidFill>
+                <a:latin typeface="맑은 고딕" panose="020B0503020000020004" pitchFamily="50" charset="-127"/>
+              </a:rPr>
+              <a:t>: </a:t>
+            </a:r>
+            <a:r>
+              <a:rPr lang="ko-KR" altLang="en-US" sz="1200">
+                <a:solidFill>
+                  <a:srgbClr val="4C4C4C"/>
+                </a:solidFill>
+                <a:latin typeface="맑은 고딕" panose="020B0503020000020004" pitchFamily="50" charset="-127"/>
+              </a:rPr>
+              <a:t>화면 전환과 토큰 저장 </a:t>
+            </a:r>
+            <a:r>
+              <a:rPr lang="en-US" altLang="ko-KR" sz="1200">
+                <a:solidFill>
+                  <a:srgbClr val="4C4C4C"/>
+                </a:solidFill>
+                <a:latin typeface="맑은 고딕" panose="020B0503020000020004" pitchFamily="50" charset="-127"/>
+              </a:rPr>
+              <a:t>/ </a:t>
+            </a:r>
+            <a:r>
+              <a:rPr lang="ko-KR" altLang="en-US" sz="1200">
+                <a:solidFill>
+                  <a:srgbClr val="4C4C4C"/>
+                </a:solidFill>
+                <a:latin typeface="맑은 고딕" panose="020B0503020000020004" pitchFamily="50" charset="-127"/>
+              </a:rPr>
+              <a:t>백엔드</a:t>
+            </a:r>
+            <a:r>
+              <a:rPr lang="en-US" altLang="ko-KR" sz="1200">
+                <a:solidFill>
+                  <a:srgbClr val="4C4C4C"/>
+                </a:solidFill>
+                <a:latin typeface="맑은 고딕" panose="020B0503020000020004" pitchFamily="50" charset="-127"/>
+              </a:rPr>
+              <a:t>: </a:t>
+            </a:r>
+            <a:r>
+              <a:rPr lang="ko-KR" altLang="en-US" sz="1200">
+                <a:solidFill>
+                  <a:srgbClr val="4C4C4C"/>
+                </a:solidFill>
+                <a:latin typeface="맑은 고딕" panose="020B0503020000020004" pitchFamily="50" charset="-127"/>
+              </a:rPr>
+              <a:t>입력 검증</a:t>
+            </a:r>
+            <a:r>
+              <a:rPr lang="en-US" altLang="ko-KR" sz="1200">
+                <a:solidFill>
+                  <a:srgbClr val="4C4C4C"/>
+                </a:solidFill>
+                <a:latin typeface="맑은 고딕" panose="020B0503020000020004" pitchFamily="50" charset="-127"/>
+              </a:rPr>
+              <a:t>, </a:t>
+            </a:r>
+            <a:r>
+              <a:rPr lang="ko-KR" altLang="en-US" sz="1200">
+                <a:solidFill>
+                  <a:srgbClr val="4C4C4C"/>
+                </a:solidFill>
+                <a:latin typeface="맑은 고딕" panose="020B0503020000020004" pitchFamily="50" charset="-127"/>
+              </a:rPr>
+              <a:t>이메일 인증</a:t>
+            </a:r>
+            <a:r>
+              <a:rPr lang="en-US" altLang="ko-KR" sz="1200">
+                <a:solidFill>
+                  <a:srgbClr val="4C4C4C"/>
+                </a:solidFill>
+                <a:latin typeface="맑은 고딕" panose="020B0503020000020004" pitchFamily="50" charset="-127"/>
+              </a:rPr>
+              <a:t>, JWT </a:t>
+            </a:r>
+            <a:r>
+              <a:rPr lang="ko-KR" altLang="en-US" sz="1200">
+                <a:solidFill>
+                  <a:srgbClr val="4C4C4C"/>
+                </a:solidFill>
+                <a:latin typeface="맑은 고딕" panose="020B0503020000020004" pitchFamily="50" charset="-127"/>
+              </a:rPr>
+              <a:t>검증</a:t>
+            </a:r>
+            <a:r>
+              <a:rPr lang="en-US" altLang="ko-KR" sz="1200">
+                <a:solidFill>
+                  <a:srgbClr val="4C4C4C"/>
+                </a:solidFill>
+                <a:latin typeface="맑은 고딕" panose="020B0503020000020004" pitchFamily="50" charset="-127"/>
+              </a:rPr>
+              <a:t>, DB </a:t>
+            </a:r>
+            <a:r>
+              <a:rPr lang="ko-KR" altLang="en-US" sz="1200">
+                <a:solidFill>
+                  <a:srgbClr val="4C4C4C"/>
+                </a:solidFill>
+                <a:latin typeface="맑은 고딕" panose="020B0503020000020004" pitchFamily="50" charset="-127"/>
+              </a:rPr>
+              <a:t>처리</a:t>
+            </a:r>
+          </a:p>
+        </p:txBody>
+      </p:sp>
+      <p:sp>
+        <p:nvSpPr>
+          <p:cNvPr id="19" name="TextBox 18">
+            <a:extLst>
+              <a:ext uri="{FF2B5EF4-FFF2-40B4-BE49-F238E27FC236}">
+                <a16:creationId xmlns:a16="http://schemas.microsoft.com/office/drawing/2014/main" id="{D5165D10-9963-FB5D-3482-5B2B6F1F9894}"/>
+              </a:ext>
+            </a:extLst>
+          </p:cNvPr>
+          <p:cNvSpPr txBox="1"/>
+          <p:nvPr/>
+        </p:nvSpPr>
+        <p:spPr>
+          <a:xfrm>
+            <a:off x="812800" y="6350000"/>
+            <a:ext cx="4572000" cy="230832"/>
+          </a:xfrm>
+          <a:prstGeom prst="rect">
+            <a:avLst/>
+          </a:prstGeom>
+          <a:noFill/>
+        </p:spPr>
+        <p:txBody>
+          <a:bodyPr vert="horz" rtlCol="0">
+            <a:spAutoFit/>
+          </a:bodyPr>
+          <a:lstStyle/>
+          <a:p>
+            <a:r>
+              <a:rPr lang="en-US" altLang="ko-KR" sz="900">
+                <a:solidFill>
+                  <a:srgbClr val="686472"/>
+                </a:solidFill>
+                <a:latin typeface="Arial" panose="020B0604020202020204" pitchFamily="34" charset="0"/>
+              </a:rPr>
+              <a:t>Career Mission AI · 8/9</a:t>
+            </a:r>
+            <a:endParaRPr lang="ko-KR" altLang="en-US" sz="900" dirty="0">
+              <a:solidFill>
+                <a:srgbClr val="686472"/>
+              </a:solidFill>
+              <a:latin typeface="Arial" panose="020B0604020202020204" pitchFamily="34" charset="0"/>
+            </a:endParaRPr>
+          </a:p>
+        </p:txBody>
+      </p:sp>
+    </p:spTree>
+    <p:extLst>
+      <p:ext uri="{BB962C8B-B14F-4D97-AF65-F5344CB8AC3E}">
+        <p14:creationId xmlns:p14="http://schemas.microsoft.com/office/powerpoint/2010/main" val="2308402675"/>
+      </p:ext>
+    </p:extLst>
+  </p:cSld>
+  <p:clrMapOvr>
+    <a:masterClrMapping/>
+  </p:clrMapOvr>
+</p:sld>
+</file>
+
+<file path=ppt/slides/slide9.xml><?xml version="1.0" encoding="utf-8"?>
+<p:sld xmlns:a="http://schemas.openxmlformats.org/drawingml/2006/main" xmlns:r="http://schemas.openxmlformats.org/officeDocument/2006/relationships" xmlns:p="http://schemas.openxmlformats.org/presentationml/2006/main">
+  <p:cSld>
+    <p:bg>
+      <p:bgPr>
+        <a:solidFill>
+          <a:srgbClr val="F8FCFC"/>
+        </a:solidFill>
+        <a:effectLst/>
+      </p:bgPr>
+    </p:bg>
+    <p:spTree>
+      <p:nvGrpSpPr>
+        <p:cNvPr id="1" name=""/>
+        <p:cNvGrpSpPr/>
+        <p:nvPr/>
+      </p:nvGrpSpPr>
+      <p:grpSpPr>
+        <a:xfrm>
+          <a:off x="0" y="0"/>
+          <a:ext cx="0" cy="0"/>
+          <a:chOff x="0" y="0"/>
+          <a:chExt cx="0" cy="0"/>
+        </a:xfrm>
+      </p:grpSpPr>
+      <p:sp>
+        <p:nvSpPr>
+          <p:cNvPr id="2" name="TextBox 1">
+            <a:extLst>
+              <a:ext uri="{FF2B5EF4-FFF2-40B4-BE49-F238E27FC236}">
                 <a16:creationId xmlns:a16="http://schemas.microsoft.com/office/drawing/2014/main" id="{E0A82B3A-115A-4310-F58A-4F47A2B413A3}"/>
               </a:ext>
             </a:extLst>
@@ -7506,6 +8498,52 @@
                 <a:srgbClr val="4C4C4C"/>
               </a:solidFill>
               <a:latin typeface="맑은 고딕" panose="020B0503020000020004" pitchFamily="50" charset="-127"/>
+            </a:endParaRPr>
+          </a:p>
+        </p:txBody>
+      </p:sp>
+      <p:sp>
+        <p:nvSpPr>
+          <p:cNvPr id="16" name="TextBox 15">
+            <a:extLst>
+              <a:ext uri="{FF2B5EF4-FFF2-40B4-BE49-F238E27FC236}">
+                <a16:creationId xmlns:a16="http://schemas.microsoft.com/office/drawing/2014/main" id="{32AABB65-0B06-9403-C43E-71A25B8DF849}"/>
+              </a:ext>
+            </a:extLst>
+          </p:cNvPr>
+          <p:cNvSpPr txBox="1"/>
+          <p:nvPr/>
+        </p:nvSpPr>
+        <p:spPr>
+          <a:xfrm>
+            <a:off x="812800" y="6350000"/>
+            <a:ext cx="4572000" cy="230832"/>
+          </a:xfrm>
+          <a:prstGeom prst="rect">
+            <a:avLst/>
+          </a:prstGeom>
+          <a:noFill/>
+        </p:spPr>
+        <p:txBody>
+          <a:bodyPr vert="horz" rtlCol="0">
+            <a:spAutoFit/>
+          </a:bodyPr>
+          <a:lstStyle/>
+          <a:p>
+            <a:r>
+              <a:rPr lang="en-US" altLang="ko-KR" sz="900">
+                <a:solidFill>
+                  <a:srgbClr val="686472"/>
+                </a:solidFill>
+                <a:latin typeface="Arial" panose="020B0604020202020204" pitchFamily="34" charset="0"/>
+              </a:rPr>
+              <a:t>Career Mission AI · 9/9</a:t>
+            </a:r>
+            <a:endParaRPr lang="ko-KR" altLang="en-US" sz="900" dirty="0">
+              <a:solidFill>
+                <a:srgbClr val="686472"/>
+              </a:solidFill>
+              <a:latin typeface="Arial" panose="020B0604020202020204" pitchFamily="34" charset="0"/>
             </a:endParaRPr>
           </a:p>
         </p:txBody>
@@ -7816,4 +8854,299 @@
     </a:ext>
   </a:extLst>
 </a:theme>
+</file>
+
+<file path=ppt/theme/theme2.xml><?xml version="1.0" encoding="utf-8"?>
+<a:theme xmlns:a="http://schemas.openxmlformats.org/drawingml/2006/main" name="Office 테마">
+  <a:themeElements>
+    <a:clrScheme name="Office">
+      <a:dk1>
+        <a:sysClr val="windowText" lastClr="000000"/>
+      </a:dk1>
+      <a:lt1>
+        <a:sysClr val="window" lastClr="FFFFFF"/>
+      </a:lt1>
+      <a:dk2>
+        <a:srgbClr val="44546A"/>
+      </a:dk2>
+      <a:lt2>
+        <a:srgbClr val="E7E6E6"/>
+      </a:lt2>
+      <a:accent1>
+        <a:srgbClr val="4472C4"/>
+      </a:accent1>
+      <a:accent2>
+        <a:srgbClr val="ED7D31"/>
+      </a:accent2>
+      <a:accent3>
+        <a:srgbClr val="A5A5A5"/>
+      </a:accent3>
+      <a:accent4>
+        <a:srgbClr val="FFC000"/>
+      </a:accent4>
+      <a:accent5>
+        <a:srgbClr val="5B9BD5"/>
+      </a:accent5>
+      <a:accent6>
+        <a:srgbClr val="70AD47"/>
+      </a:accent6>
+      <a:hlink>
+        <a:srgbClr val="0563C1"/>
+      </a:hlink>
+      <a:folHlink>
+        <a:srgbClr val="954F72"/>
+      </a:folHlink>
+    </a:clrScheme>
+    <a:fontScheme name="Office">
+      <a:majorFont>
+        <a:latin typeface="맑은 고딕" panose="020F0302020204030204"/>
+        <a:ea typeface=""/>
+        <a:cs typeface=""/>
+        <a:font script="Jpan" typeface="游ゴシック Light"/>
+        <a:font script="Hang" typeface="맑은 고딕"/>
+        <a:font script="Hans" typeface="等线 Light"/>
+        <a:font script="Hant" typeface="新細明體"/>
+        <a:font script="Arab" typeface="Times New Roman"/>
+        <a:font script="Hebr" typeface="Times New Roman"/>
+        <a:font script="Thai" typeface="Angsana New"/>
+        <a:font script="Ethi" typeface="Nyala"/>
+        <a:font script="Beng" typeface="Vrinda"/>
+        <a:font script="Gujr" typeface="Shruti"/>
+        <a:font script="Khmr" typeface="MoolBoran"/>
+        <a:font script="Knda" typeface="Tunga"/>
+        <a:font script="Guru" typeface="Raavi"/>
+        <a:font script="Cans" typeface="Euphemia"/>
+        <a:font script="Cher" typeface="Plantagenet Cherokee"/>
+        <a:font script="Yiii" typeface="Microsoft Yi Baiti"/>
+        <a:font script="Tibt" typeface="Microsoft Himalaya"/>
+        <a:font script="Thaa" typeface="MV Boli"/>
+        <a:font script="Deva" typeface="Mangal"/>
+        <a:font script="Telu" typeface="Gautami"/>
+        <a:font script="Taml" typeface="Latha"/>
+        <a:font script="Syrc" typeface="Estrangelo Edessa"/>
+        <a:font script="Orya" typeface="Kalinga"/>
+        <a:font script="Mlym" typeface="Kartika"/>
+        <a:font script="Laoo" typeface="DokChampa"/>
+        <a:font script="Sinh" typeface="Iskoola Pota"/>
+        <a:font script="Mong" typeface="Mongolian Baiti"/>
+        <a:font script="Viet" typeface="Times New Roman"/>
+        <a:font script="Uigh" typeface="Microsoft Uighur"/>
+        <a:font script="Geor" typeface="Sylfaen"/>
+        <a:font script="Armn" typeface="Arial"/>
+        <a:font script="Bugi" typeface="Leelawadee UI"/>
+        <a:font script="Bopo" typeface="Microsoft JhengHei"/>
+        <a:font script="Java" typeface="Javanese Text"/>
+        <a:font script="Lisu" typeface="Segoe UI"/>
+        <a:font script="Mymr" typeface="Myanmar Text"/>
+        <a:font script="Nkoo" typeface="Ebrima"/>
+        <a:font script="Olck" typeface="Nirmala UI"/>
+        <a:font script="Osma" typeface="Ebrima"/>
+        <a:font script="Phag" typeface="Phagspa"/>
+        <a:font script="Syrn" typeface="Estrangelo Edessa"/>
+        <a:font script="Syrj" typeface="Estrangelo Edessa"/>
+        <a:font script="Syre" typeface="Estrangelo Edessa"/>
+        <a:font script="Sora" typeface="Nirmala UI"/>
+        <a:font script="Tale" typeface="Microsoft Tai Le"/>
+        <a:font script="Talu" typeface="Microsoft New Tai Lue"/>
+        <a:font script="Tfng" typeface="Ebrima"/>
+      </a:majorFont>
+      <a:minorFont>
+        <a:latin typeface="맑은 고딕" panose="020F0502020204030204"/>
+        <a:ea typeface=""/>
+        <a:cs typeface=""/>
+        <a:font script="Jpan" typeface="游ゴシック"/>
+        <a:font script="Hang" typeface="맑은 고딕"/>
+        <a:font script="Hans" typeface="等线"/>
+        <a:font script="Hant" typeface="新細明體"/>
+        <a:font script="Arab" typeface="Arial"/>
+        <a:font script="Hebr" typeface="Arial"/>
+        <a:font script="Thai" typeface="Cordia New"/>
+        <a:font script="Ethi" typeface="Nyala"/>
+        <a:font script="Beng" typeface="Vrinda"/>
+        <a:font script="Gujr" typeface="Shruti"/>
+        <a:font script="Khmr" typeface="DaunPenh"/>
+        <a:font script="Knda" typeface="Tunga"/>
+        <a:font script="Guru" typeface="Raavi"/>
+        <a:font script="Cans" typeface="Euphemia"/>
+        <a:font script="Cher" typeface="Plantagenet Cherokee"/>
+        <a:font script="Yiii" typeface="Microsoft Yi Baiti"/>
+        <a:font script="Tibt" typeface="Microsoft Himalaya"/>
+        <a:font script="Thaa" typeface="MV Boli"/>
+        <a:font script="Deva" typeface="Mangal"/>
+        <a:font script="Telu" typeface="Gautami"/>
+        <a:font script="Taml" typeface="Latha"/>
+        <a:font script="Syrc" typeface="Estrangelo Edessa"/>
+        <a:font script="Orya" typeface="Kalinga"/>
+        <a:font script="Mlym" typeface="Kartika"/>
+        <a:font script="Laoo" typeface="DokChampa"/>
+        <a:font script="Sinh" typeface="Iskoola Pota"/>
+        <a:font script="Mong" typeface="Mongolian Baiti"/>
+        <a:font script="Viet" typeface="Arial"/>
+        <a:font script="Uigh" typeface="Microsoft Uighur"/>
+        <a:font script="Geor" typeface="Sylfaen"/>
+        <a:font script="Armn" typeface="Arial"/>
+        <a:font script="Bugi" typeface="Leelawadee UI"/>
+        <a:font script="Bopo" typeface="Microsoft JhengHei"/>
+        <a:font script="Java" typeface="Javanese Text"/>
+        <a:font script="Lisu" typeface="Segoe UI"/>
+        <a:font script="Mymr" typeface="Myanmar Text"/>
+        <a:font script="Nkoo" typeface="Ebrima"/>
+        <a:font script="Olck" typeface="Nirmala UI"/>
+        <a:font script="Osma" typeface="Ebrima"/>
+        <a:font script="Phag" typeface="Phagspa"/>
+        <a:font script="Syrn" typeface="Estrangelo Edessa"/>
+        <a:font script="Syrj" typeface="Estrangelo Edessa"/>
+        <a:font script="Syre" typeface="Estrangelo Edessa"/>
+        <a:font script="Sora" typeface="Nirmala UI"/>
+        <a:font script="Tale" typeface="Microsoft Tai Le"/>
+        <a:font script="Talu" typeface="Microsoft New Tai Lue"/>
+        <a:font script="Tfng" typeface="Ebrima"/>
+      </a:minorFont>
+    </a:fontScheme>
+    <a:fmtScheme name="Office">
+      <a:fillStyleLst>
+        <a:solidFill>
+          <a:schemeClr val="phClr"/>
+        </a:solidFill>
+        <a:gradFill rotWithShape="1">
+          <a:gsLst>
+            <a:gs pos="0">
+              <a:schemeClr val="phClr">
+                <a:lumMod val="110000"/>
+                <a:satMod val="105000"/>
+                <a:tint val="67000"/>
+              </a:schemeClr>
+            </a:gs>
+            <a:gs pos="50000">
+              <a:schemeClr val="phClr">
+                <a:lumMod val="105000"/>
+                <a:satMod val="103000"/>
+                <a:tint val="73000"/>
+              </a:schemeClr>
+            </a:gs>
+            <a:gs pos="100000">
+              <a:schemeClr val="phClr">
+                <a:lumMod val="105000"/>
+                <a:satMod val="109000"/>
+                <a:tint val="81000"/>
+              </a:schemeClr>
+            </a:gs>
+          </a:gsLst>
+          <a:lin ang="5400000" scaled="0"/>
+        </a:gradFill>
+        <a:gradFill rotWithShape="1">
+          <a:gsLst>
+            <a:gs pos="0">
+              <a:schemeClr val="phClr">
+                <a:satMod val="103000"/>
+                <a:lumMod val="102000"/>
+                <a:tint val="94000"/>
+              </a:schemeClr>
+            </a:gs>
+            <a:gs pos="50000">
+              <a:schemeClr val="phClr">
+                <a:satMod val="110000"/>
+                <a:lumMod val="100000"/>
+                <a:shade val="100000"/>
+              </a:schemeClr>
+            </a:gs>
+            <a:gs pos="100000">
+              <a:schemeClr val="phClr">
+                <a:lumMod val="99000"/>
+                <a:satMod val="120000"/>
+                <a:shade val="78000"/>
+              </a:schemeClr>
+            </a:gs>
+          </a:gsLst>
+          <a:lin ang="5400000" scaled="0"/>
+        </a:gradFill>
+      </a:fillStyleLst>
+      <a:lnStyleLst>
+        <a:ln w="6350" cap="flat" cmpd="sng" algn="ctr">
+          <a:solidFill>
+            <a:schemeClr val="phClr"/>
+          </a:solidFill>
+          <a:prstDash val="solid"/>
+          <a:miter lim="800000"/>
+        </a:ln>
+        <a:ln w="12700" cap="flat" cmpd="sng" algn="ctr">
+          <a:solidFill>
+            <a:schemeClr val="phClr"/>
+          </a:solidFill>
+          <a:prstDash val="solid"/>
+          <a:miter lim="800000"/>
+        </a:ln>
+        <a:ln w="19050" cap="flat" cmpd="sng" algn="ctr">
+          <a:solidFill>
+            <a:schemeClr val="phClr"/>
+          </a:solidFill>
+          <a:prstDash val="solid"/>
+          <a:miter lim="800000"/>
+        </a:ln>
+      </a:lnStyleLst>
+      <a:effectStyleLst>
+        <a:effectStyle>
+          <a:effectLst/>
+        </a:effectStyle>
+        <a:effectStyle>
+          <a:effectLst/>
+        </a:effectStyle>
+        <a:effectStyle>
+          <a:effectLst>
+            <a:outerShdw blurRad="57150" dist="19050" dir="5400000" algn="ctr" rotWithShape="0">
+              <a:srgbClr val="000000">
+                <a:alpha val="63000"/>
+              </a:srgbClr>
+            </a:outerShdw>
+          </a:effectLst>
+        </a:effectStyle>
+      </a:effectStyleLst>
+      <a:bgFillStyleLst>
+        <a:solidFill>
+          <a:schemeClr val="phClr"/>
+        </a:solidFill>
+        <a:solidFill>
+          <a:schemeClr val="phClr">
+            <a:tint val="95000"/>
+            <a:satMod val="170000"/>
+          </a:schemeClr>
+        </a:solidFill>
+        <a:gradFill rotWithShape="1">
+          <a:gsLst>
+            <a:gs pos="0">
+              <a:schemeClr val="phClr">
+                <a:tint val="93000"/>
+                <a:satMod val="150000"/>
+                <a:shade val="98000"/>
+                <a:lumMod val="102000"/>
+              </a:schemeClr>
+            </a:gs>
+            <a:gs pos="50000">
+              <a:schemeClr val="phClr">
+                <a:tint val="98000"/>
+                <a:satMod val="130000"/>
+                <a:shade val="90000"/>
+                <a:lumMod val="103000"/>
+              </a:schemeClr>
+            </a:gs>
+            <a:gs pos="100000">
+              <a:schemeClr val="phClr">
+                <a:shade val="63000"/>
+                <a:satMod val="120000"/>
+              </a:schemeClr>
+            </a:gs>
+          </a:gsLst>
+          <a:lin ang="5400000" scaled="0"/>
+        </a:gradFill>
+      </a:bgFillStyleLst>
+    </a:fmtScheme>
+  </a:themeElements>
+  <a:objectDefaults/>
+  <a:extraClrSchemeLst/>
+  <a:extLst>
+    <a:ext uri="{05A4C25C-085E-4340-85A3-A5531E510DB2}">
+      <thm15:themeFamily xmlns:thm15="http://schemas.microsoft.com/office/thememl/2012/main" name="Office Theme" id="{62F939B6-93AF-4DB8-9C6B-D6C7DFDC589F}" vid="{4A3C46E8-61CC-4603-A589-7422A47A8E4A}"/>
+    </a:ext>
+  </a:extLst>
+</a:theme>
 </file>